--- a/Звіт/Практика/Презентація_практика_Ніколаєв_1.pptx
+++ b/Звіт/Практика/Презентація_практика_Ніколаєв_1.pptx
@@ -5945,7 +5945,62 @@
                 <a:ea typeface="Calibri" pitchFamily="34" charset="-122"/>
                 <a:cs typeface="Calibri" pitchFamily="34" charset="-120"/>
               </a:rPr>
-              <a:t>Математичні моделі та еволюційні алгоритми маршрутизації транспортних засобів</a:t>
+              <a:t>Математичні моделі </a:t>
+            </a:r>
+            <a:r>
+              <a:rPr lang="en-US" sz="1250" dirty="0" err="1">
+                <a:solidFill>
+                  <a:srgbClr val="1E293B"/>
+                </a:solidFill>
+                <a:latin typeface="Calibri" pitchFamily="34" charset="0"/>
+                <a:ea typeface="Calibri" pitchFamily="34" charset="-122"/>
+                <a:cs typeface="Calibri" pitchFamily="34" charset="-120"/>
+              </a:rPr>
+              <a:t>та</a:t>
+            </a:r>
+            <a:r>
+              <a:rPr lang="en-US" sz="1250" dirty="0">
+                <a:solidFill>
+                  <a:srgbClr val="1E293B"/>
+                </a:solidFill>
+                <a:latin typeface="Calibri" pitchFamily="34" charset="0"/>
+                <a:ea typeface="Calibri" pitchFamily="34" charset="-122"/>
+                <a:cs typeface="Calibri" pitchFamily="34" charset="-120"/>
+              </a:rPr>
+              <a:t> </a:t>
+            </a:r>
+            <a:r>
+              <a:rPr lang="en-US" sz="1250" dirty="0" err="1">
+                <a:solidFill>
+                  <a:srgbClr val="1E293B"/>
+                </a:solidFill>
+                <a:latin typeface="Calibri" pitchFamily="34" charset="0"/>
+                <a:ea typeface="Calibri" pitchFamily="34" charset="-122"/>
+                <a:cs typeface="Calibri" pitchFamily="34" charset="-120"/>
+              </a:rPr>
+              <a:t>ев</a:t>
+            </a:r>
+            <a:r>
+              <a:rPr lang="uk-UA" sz="1250" dirty="0">
+                <a:solidFill>
+                  <a:srgbClr val="1E293B"/>
+                </a:solidFill>
+                <a:latin typeface="Calibri" pitchFamily="34" charset="0"/>
+                <a:ea typeface="Calibri" pitchFamily="34" charset="-122"/>
+                <a:cs typeface="Calibri" pitchFamily="34" charset="-120"/>
+              </a:rPr>
+              <a:t>ристичні</a:t>
+            </a:r>
+            <a:r>
+              <a:rPr lang="en-US" sz="1250" dirty="0">
+                <a:solidFill>
+                  <a:srgbClr val="1E293B"/>
+                </a:solidFill>
+                <a:latin typeface="Calibri" pitchFamily="34" charset="0"/>
+                <a:ea typeface="Calibri" pitchFamily="34" charset="-122"/>
+                <a:cs typeface="Calibri" pitchFamily="34" charset="-120"/>
+              </a:rPr>
+              <a:t> алгоритми маршрутизації транспортних засобів</a:t>
             </a:r>
             <a:endParaRPr lang="en-US" sz="1250" dirty="0"/>
           </a:p>
@@ -6772,7 +6827,7 @@
               <a:buNone/>
             </a:pPr>
             <a:r>
-              <a:rPr lang="en-US" sz="1400" b="1" dirty="0">
+              <a:rPr lang="uk-UA" sz="1400" b="1" dirty="0">
                 <a:solidFill>
                   <a:srgbClr val="0B1D3A"/>
                 </a:solidFill>
@@ -6780,7 +6835,29 @@
                 <a:ea typeface="Trebuchet MS" pitchFamily="34" charset="-122"/>
                 <a:cs typeface="Trebuchet MS" pitchFamily="34" charset="-120"/>
               </a:rPr>
-              <a:t>Генетичні алгоритми</a:t>
+              <a:t>А</a:t>
+            </a:r>
+            <a:r>
+              <a:rPr lang="en-US" sz="1400" b="1" dirty="0" err="1">
+                <a:solidFill>
+                  <a:srgbClr val="0B1D3A"/>
+                </a:solidFill>
+                <a:latin typeface="Trebuchet MS" pitchFamily="34" charset="0"/>
+                <a:ea typeface="Trebuchet MS" pitchFamily="34" charset="-122"/>
+                <a:cs typeface="Trebuchet MS" pitchFamily="34" charset="-120"/>
+              </a:rPr>
+              <a:t>лгоритми</a:t>
+            </a:r>
+            <a:r>
+              <a:rPr lang="uk-UA" sz="1400" b="1" dirty="0">
+                <a:solidFill>
+                  <a:srgbClr val="0B1D3A"/>
+                </a:solidFill>
+                <a:latin typeface="Trebuchet MS" pitchFamily="34" charset="0"/>
+                <a:ea typeface="Trebuchet MS" pitchFamily="34" charset="-122"/>
+                <a:cs typeface="Trebuchet MS" pitchFamily="34" charset="-120"/>
+              </a:rPr>
+              <a:t> оптимізації</a:t>
             </a:r>
             <a:endParaRPr lang="en-US" sz="1400" dirty="0"/>
           </a:p>
@@ -6844,7 +6921,40 @@
                 <a:ea typeface="Calibri" pitchFamily="34" charset="-122"/>
                 <a:cs typeface="Calibri" pitchFamily="34" charset="-120"/>
               </a:rPr>
-              <a:t> ефективно досліджують простір NP-складних задач.</a:t>
+              <a:t> </a:t>
+            </a:r>
+            <a:r>
+              <a:rPr lang="uk-UA" sz="1100" dirty="0">
+                <a:solidFill>
+                  <a:srgbClr val="1E293B"/>
+                </a:solidFill>
+                <a:latin typeface="Calibri" pitchFamily="34" charset="0"/>
+                <a:ea typeface="Calibri" pitchFamily="34" charset="-122"/>
+                <a:cs typeface="Calibri" pitchFamily="34" charset="-120"/>
+              </a:rPr>
+              <a:t>більш </a:t>
+            </a:r>
+            <a:r>
+              <a:rPr lang="en-US" sz="1100" dirty="0" err="1">
+                <a:solidFill>
+                  <a:srgbClr val="1E293B"/>
+                </a:solidFill>
+                <a:latin typeface="Calibri" pitchFamily="34" charset="0"/>
+                <a:ea typeface="Calibri" pitchFamily="34" charset="-122"/>
+                <a:cs typeface="Calibri" pitchFamily="34" charset="-120"/>
+              </a:rPr>
+              <a:t>ефективно</a:t>
+            </a:r>
+            <a:r>
+              <a:rPr lang="en-US" sz="1100" dirty="0">
+                <a:solidFill>
+                  <a:srgbClr val="1E293B"/>
+                </a:solidFill>
+                <a:latin typeface="Calibri" pitchFamily="34" charset="0"/>
+                <a:ea typeface="Calibri" pitchFamily="34" charset="-122"/>
+                <a:cs typeface="Calibri" pitchFamily="34" charset="-120"/>
+              </a:rPr>
+              <a:t> досліджують простір NP-складних задач.</a:t>
             </a:r>
             <a:endParaRPr lang="en-US" sz="1100" dirty="0"/>
           </a:p>
@@ -7548,8 +7658,8 @@
         </p:nvSpPr>
         <p:spPr>
           <a:xfrm>
-            <a:off x="548640" y="1325880"/>
-            <a:ext cx="8046720" cy="2220686"/>
+            <a:off x="1345474" y="1325880"/>
+            <a:ext cx="6400800" cy="2220686"/>
           </a:xfrm>
           <a:prstGeom prst="rect">
             <a:avLst/>
@@ -7567,9 +7677,465 @@
           </a:effectLst>
         </p:spPr>
       </p:sp>
+      <p:sp>
+        <p:nvSpPr>
+          <p:cNvPr id="6" name="Text 3"/>
+          <p:cNvSpPr/>
+          <p:nvPr/>
+        </p:nvSpPr>
+        <p:spPr>
+          <a:xfrm>
+            <a:off x="548640" y="3546566"/>
+            <a:ext cx="3657600" cy="411480"/>
+          </a:xfrm>
+          <a:prstGeom prst="rect">
+            <a:avLst/>
+          </a:prstGeom>
+          <a:noFill/>
+          <a:ln/>
+        </p:spPr>
+        <p:txBody>
+          <a:bodyPr wrap="square" lIns="0" tIns="0" rIns="0" bIns="0" rtlCol="0" anchor="ctr"/>
+          <a:lstStyle/>
+          <a:p>
+            <a:pPr marL="0" indent="0">
+              <a:buNone/>
+            </a:pPr>
+            <a:r>
+              <a:rPr lang="en-US" sz="1600" b="1" dirty="0">
+                <a:solidFill>
+                  <a:srgbClr val="0B1D3A"/>
+                </a:solidFill>
+                <a:latin typeface="Trebuchet MS" pitchFamily="34" charset="0"/>
+                <a:ea typeface="Trebuchet MS" pitchFamily="34" charset="-122"/>
+                <a:cs typeface="Trebuchet MS" pitchFamily="34" charset="-120"/>
+              </a:rPr>
+              <a:t>Обмеження моделі</a:t>
+            </a:r>
+            <a:endParaRPr lang="en-US" sz="1600" dirty="0"/>
+          </a:p>
+        </p:txBody>
+      </p:sp>
+      <p:sp>
+        <p:nvSpPr>
+          <p:cNvPr id="7" name="Shape 4"/>
+          <p:cNvSpPr/>
+          <p:nvPr/>
+        </p:nvSpPr>
+        <p:spPr>
+          <a:xfrm>
+            <a:off x="640080" y="4050792"/>
+            <a:ext cx="201168" cy="201168"/>
+          </a:xfrm>
+          <a:prstGeom prst="ellipse">
+            <a:avLst/>
+          </a:prstGeom>
+          <a:solidFill>
+            <a:srgbClr val="14B8A6"/>
+          </a:solidFill>
+          <a:ln/>
+        </p:spPr>
+      </p:sp>
+      <p:sp>
+        <p:nvSpPr>
+          <p:cNvPr id="8" name="Text 5"/>
+          <p:cNvSpPr/>
+          <p:nvPr/>
+        </p:nvSpPr>
+        <p:spPr>
+          <a:xfrm>
+            <a:off x="640080" y="4050792"/>
+            <a:ext cx="201168" cy="201168"/>
+          </a:xfrm>
+          <a:prstGeom prst="rect">
+            <a:avLst/>
+          </a:prstGeom>
+          <a:noFill/>
+          <a:ln/>
+        </p:spPr>
+        <p:txBody>
+          <a:bodyPr wrap="square" lIns="0" tIns="0" rIns="0" bIns="0" rtlCol="0" anchor="ctr"/>
+          <a:lstStyle/>
+          <a:p>
+            <a:pPr marL="0" indent="0" algn="ctr">
+              <a:buNone/>
+            </a:pPr>
+            <a:r>
+              <a:rPr lang="en-US" sz="900" b="1" dirty="0">
+                <a:solidFill>
+                  <a:srgbClr val="FFFFFF"/>
+                </a:solidFill>
+                <a:latin typeface="Calibri" pitchFamily="34" charset="0"/>
+                <a:ea typeface="Calibri" pitchFamily="34" charset="-122"/>
+                <a:cs typeface="Calibri" pitchFamily="34" charset="-120"/>
+              </a:rPr>
+              <a:t>1</a:t>
+            </a:r>
+            <a:endParaRPr lang="en-US" sz="900" dirty="0"/>
+          </a:p>
+        </p:txBody>
+      </p:sp>
+      <p:sp>
+        <p:nvSpPr>
+          <p:cNvPr id="9" name="Text 6"/>
+          <p:cNvSpPr/>
+          <p:nvPr/>
+        </p:nvSpPr>
+        <p:spPr>
+          <a:xfrm>
+            <a:off x="960120" y="4023360"/>
+            <a:ext cx="1371600" cy="256032"/>
+          </a:xfrm>
+          <a:prstGeom prst="rect">
+            <a:avLst/>
+          </a:prstGeom>
+          <a:noFill/>
+          <a:ln/>
+        </p:spPr>
+        <p:txBody>
+          <a:bodyPr wrap="square" lIns="0" tIns="0" rIns="0" bIns="0" rtlCol="0" anchor="ctr"/>
+          <a:lstStyle/>
+          <a:p>
+            <a:pPr marL="0" indent="0">
+              <a:buNone/>
+            </a:pPr>
+            <a:r>
+              <a:rPr lang="en-US" sz="1200" b="1" dirty="0">
+                <a:solidFill>
+                  <a:srgbClr val="0B1D3A"/>
+                </a:solidFill>
+                <a:latin typeface="Trebuchet MS" pitchFamily="34" charset="0"/>
+                <a:ea typeface="Trebuchet MS" pitchFamily="34" charset="-122"/>
+                <a:cs typeface="Trebuchet MS" pitchFamily="34" charset="-120"/>
+              </a:rPr>
+              <a:t>Місткість</a:t>
+            </a:r>
+            <a:endParaRPr lang="en-US" sz="1200" dirty="0"/>
+          </a:p>
+        </p:txBody>
+      </p:sp>
+      <p:sp>
+        <p:nvSpPr>
+          <p:cNvPr id="10" name="Text 7"/>
+          <p:cNvSpPr/>
+          <p:nvPr/>
+        </p:nvSpPr>
+        <p:spPr>
+          <a:xfrm>
+            <a:off x="2194560" y="4023360"/>
+            <a:ext cx="5943600" cy="256032"/>
+          </a:xfrm>
+          <a:prstGeom prst="rect">
+            <a:avLst/>
+          </a:prstGeom>
+          <a:noFill/>
+          <a:ln/>
+        </p:spPr>
+        <p:txBody>
+          <a:bodyPr wrap="square" lIns="0" tIns="0" rIns="0" bIns="0" rtlCol="0" anchor="ctr"/>
+          <a:lstStyle/>
+          <a:p>
+            <a:pPr marL="0" indent="0">
+              <a:buNone/>
+            </a:pPr>
+            <a:r>
+              <a:rPr lang="en-US" sz="1100" dirty="0">
+                <a:solidFill>
+                  <a:srgbClr val="1E293B"/>
+                </a:solidFill>
+                <a:latin typeface="Calibri" pitchFamily="34" charset="0"/>
+                <a:ea typeface="Calibri" pitchFamily="34" charset="-122"/>
+                <a:cs typeface="Calibri" pitchFamily="34" charset="-120"/>
+              </a:rPr>
+              <a:t>Сумарна вага вантажів у кожному ТЗ ≤ ліміт Q</a:t>
+            </a:r>
+            <a:endParaRPr lang="en-US" sz="1100" dirty="0"/>
+          </a:p>
+        </p:txBody>
+      </p:sp>
+      <p:sp>
+        <p:nvSpPr>
+          <p:cNvPr id="11" name="Shape 8"/>
+          <p:cNvSpPr/>
+          <p:nvPr/>
+        </p:nvSpPr>
+        <p:spPr>
+          <a:xfrm>
+            <a:off x="640080" y="4379976"/>
+            <a:ext cx="201168" cy="201168"/>
+          </a:xfrm>
+          <a:prstGeom prst="ellipse">
+            <a:avLst/>
+          </a:prstGeom>
+          <a:solidFill>
+            <a:srgbClr val="14B8A6"/>
+          </a:solidFill>
+          <a:ln/>
+        </p:spPr>
+      </p:sp>
+      <p:sp>
+        <p:nvSpPr>
+          <p:cNvPr id="12" name="Text 9"/>
+          <p:cNvSpPr/>
+          <p:nvPr/>
+        </p:nvSpPr>
+        <p:spPr>
+          <a:xfrm>
+            <a:off x="640080" y="4379976"/>
+            <a:ext cx="201168" cy="201168"/>
+          </a:xfrm>
+          <a:prstGeom prst="rect">
+            <a:avLst/>
+          </a:prstGeom>
+          <a:noFill/>
+          <a:ln/>
+        </p:spPr>
+        <p:txBody>
+          <a:bodyPr wrap="square" lIns="0" tIns="0" rIns="0" bIns="0" rtlCol="0" anchor="ctr"/>
+          <a:lstStyle/>
+          <a:p>
+            <a:pPr marL="0" indent="0" algn="ctr">
+              <a:buNone/>
+            </a:pPr>
+            <a:r>
+              <a:rPr lang="en-US" sz="900" b="1" dirty="0">
+                <a:solidFill>
+                  <a:srgbClr val="FFFFFF"/>
+                </a:solidFill>
+                <a:latin typeface="Calibri" pitchFamily="34" charset="0"/>
+                <a:ea typeface="Calibri" pitchFamily="34" charset="-122"/>
+                <a:cs typeface="Calibri" pitchFamily="34" charset="-120"/>
+              </a:rPr>
+              <a:t>2</a:t>
+            </a:r>
+            <a:endParaRPr lang="en-US" sz="900" dirty="0"/>
+          </a:p>
+        </p:txBody>
+      </p:sp>
+      <p:sp>
+        <p:nvSpPr>
+          <p:cNvPr id="13" name="Text 10"/>
+          <p:cNvSpPr/>
+          <p:nvPr/>
+        </p:nvSpPr>
+        <p:spPr>
+          <a:xfrm>
+            <a:off x="960120" y="4352544"/>
+            <a:ext cx="1371600" cy="256032"/>
+          </a:xfrm>
+          <a:prstGeom prst="rect">
+            <a:avLst/>
+          </a:prstGeom>
+          <a:noFill/>
+          <a:ln/>
+        </p:spPr>
+        <p:txBody>
+          <a:bodyPr wrap="square" lIns="0" tIns="0" rIns="0" bIns="0" rtlCol="0" anchor="ctr"/>
+          <a:lstStyle/>
+          <a:p>
+            <a:pPr marL="0" indent="0">
+              <a:buNone/>
+            </a:pPr>
+            <a:r>
+              <a:rPr lang="en-US" sz="1200" b="1" dirty="0">
+                <a:solidFill>
+                  <a:srgbClr val="0B1D3A"/>
+                </a:solidFill>
+                <a:latin typeface="Trebuchet MS" pitchFamily="34" charset="0"/>
+                <a:ea typeface="Trebuchet MS" pitchFamily="34" charset="-122"/>
+                <a:cs typeface="Trebuchet MS" pitchFamily="34" charset="-120"/>
+              </a:rPr>
+              <a:t>Часові вікна</a:t>
+            </a:r>
+            <a:endParaRPr lang="en-US" sz="1200" dirty="0"/>
+          </a:p>
+        </p:txBody>
+      </p:sp>
+      <p:sp>
+        <p:nvSpPr>
+          <p:cNvPr id="14" name="Text 11"/>
+          <p:cNvSpPr/>
+          <p:nvPr/>
+        </p:nvSpPr>
+        <p:spPr>
+          <a:xfrm>
+            <a:off x="2194560" y="4352544"/>
+            <a:ext cx="5943600" cy="256032"/>
+          </a:xfrm>
+          <a:prstGeom prst="rect">
+            <a:avLst/>
+          </a:prstGeom>
+          <a:noFill/>
+          <a:ln/>
+        </p:spPr>
+        <p:txBody>
+          <a:bodyPr wrap="square" lIns="0" tIns="0" rIns="0" bIns="0" rtlCol="0" anchor="ctr"/>
+          <a:lstStyle/>
+          <a:p>
+            <a:pPr marL="0" indent="0">
+              <a:buNone/>
+            </a:pPr>
+            <a:r>
+              <a:rPr lang="en-US" sz="1100" dirty="0">
+                <a:solidFill>
+                  <a:srgbClr val="1E293B"/>
+                </a:solidFill>
+                <a:latin typeface="Calibri" pitchFamily="34" charset="0"/>
+                <a:ea typeface="Calibri" pitchFamily="34" charset="-122"/>
+                <a:cs typeface="Calibri" pitchFamily="34" charset="-120"/>
+              </a:rPr>
+              <a:t>Прибуття у вузол i в межах [eᵢ, lᵢ]</a:t>
+            </a:r>
+            <a:endParaRPr lang="en-US" sz="1100" dirty="0"/>
+          </a:p>
+        </p:txBody>
+      </p:sp>
+      <p:sp>
+        <p:nvSpPr>
+          <p:cNvPr id="15" name="Shape 12"/>
+          <p:cNvSpPr/>
+          <p:nvPr/>
+        </p:nvSpPr>
+        <p:spPr>
+          <a:xfrm>
+            <a:off x="640080" y="4709160"/>
+            <a:ext cx="201168" cy="201168"/>
+          </a:xfrm>
+          <a:prstGeom prst="ellipse">
+            <a:avLst/>
+          </a:prstGeom>
+          <a:solidFill>
+            <a:srgbClr val="14B8A6"/>
+          </a:solidFill>
+          <a:ln/>
+        </p:spPr>
+      </p:sp>
+      <p:sp>
+        <p:nvSpPr>
+          <p:cNvPr id="16" name="Text 13"/>
+          <p:cNvSpPr/>
+          <p:nvPr/>
+        </p:nvSpPr>
+        <p:spPr>
+          <a:xfrm>
+            <a:off x="640080" y="4709160"/>
+            <a:ext cx="201168" cy="201168"/>
+          </a:xfrm>
+          <a:prstGeom prst="rect">
+            <a:avLst/>
+          </a:prstGeom>
+          <a:noFill/>
+          <a:ln/>
+        </p:spPr>
+        <p:txBody>
+          <a:bodyPr wrap="square" lIns="0" tIns="0" rIns="0" bIns="0" rtlCol="0" anchor="ctr"/>
+          <a:lstStyle/>
+          <a:p>
+            <a:pPr marL="0" indent="0" algn="ctr">
+              <a:buNone/>
+            </a:pPr>
+            <a:r>
+              <a:rPr lang="en-US" sz="900" b="1" dirty="0">
+                <a:solidFill>
+                  <a:srgbClr val="FFFFFF"/>
+                </a:solidFill>
+                <a:latin typeface="Calibri" pitchFamily="34" charset="0"/>
+                <a:ea typeface="Calibri" pitchFamily="34" charset="-122"/>
+                <a:cs typeface="Calibri" pitchFamily="34" charset="-120"/>
+              </a:rPr>
+              <a:t>3</a:t>
+            </a:r>
+            <a:endParaRPr lang="en-US" sz="900" dirty="0"/>
+          </a:p>
+        </p:txBody>
+      </p:sp>
+      <p:sp>
+        <p:nvSpPr>
+          <p:cNvPr id="17" name="Text 14"/>
+          <p:cNvSpPr/>
+          <p:nvPr/>
+        </p:nvSpPr>
+        <p:spPr>
+          <a:xfrm>
+            <a:off x="960120" y="4681728"/>
+            <a:ext cx="1371600" cy="256032"/>
+          </a:xfrm>
+          <a:prstGeom prst="rect">
+            <a:avLst/>
+          </a:prstGeom>
+          <a:noFill/>
+          <a:ln/>
+        </p:spPr>
+        <p:txBody>
+          <a:bodyPr wrap="square" lIns="0" tIns="0" rIns="0" bIns="0" rtlCol="0" anchor="ctr"/>
+          <a:lstStyle/>
+          <a:p>
+            <a:pPr marL="0" indent="0">
+              <a:buNone/>
+            </a:pPr>
+            <a:r>
+              <a:rPr lang="en-US" sz="1200" b="1" dirty="0">
+                <a:solidFill>
+                  <a:srgbClr val="0B1D3A"/>
+                </a:solidFill>
+                <a:latin typeface="Trebuchet MS" pitchFamily="34" charset="0"/>
+                <a:ea typeface="Trebuchet MS" pitchFamily="34" charset="-122"/>
+                <a:cs typeface="Trebuchet MS" pitchFamily="34" charset="-120"/>
+              </a:rPr>
+              <a:t>Зв'язність</a:t>
+            </a:r>
+            <a:endParaRPr lang="en-US" sz="1200" dirty="0"/>
+          </a:p>
+        </p:txBody>
+      </p:sp>
+      <p:sp>
+        <p:nvSpPr>
+          <p:cNvPr id="18" name="Text 15"/>
+          <p:cNvSpPr/>
+          <p:nvPr/>
+        </p:nvSpPr>
+        <p:spPr>
+          <a:xfrm>
+            <a:off x="2194560" y="4681728"/>
+            <a:ext cx="5943600" cy="256032"/>
+          </a:xfrm>
+          <a:prstGeom prst="rect">
+            <a:avLst/>
+          </a:prstGeom>
+          <a:noFill/>
+          <a:ln/>
+        </p:spPr>
+        <p:txBody>
+          <a:bodyPr wrap="square" lIns="0" tIns="0" rIns="0" bIns="0" rtlCol="0" anchor="ctr"/>
+          <a:lstStyle/>
+          <a:p>
+            <a:pPr marL="0" indent="0">
+              <a:buNone/>
+            </a:pPr>
+            <a:r>
+              <a:rPr lang="en-US" sz="1100" dirty="0">
+                <a:solidFill>
+                  <a:srgbClr val="1E293B"/>
+                </a:solidFill>
+                <a:latin typeface="Calibri" pitchFamily="34" charset="0"/>
+                <a:ea typeface="Calibri" pitchFamily="34" charset="-122"/>
+                <a:cs typeface="Calibri" pitchFamily="34" charset="-120"/>
+              </a:rPr>
+              <a:t>Кожен клієнт відвіданий рівно один раз</a:t>
+            </a:r>
+            <a:endParaRPr lang="en-US" sz="1100" dirty="0"/>
+          </a:p>
+        </p:txBody>
+      </p:sp>
       <p:pic>
         <p:nvPicPr>
-          <p:cNvPr id="5" name="Image 0" descr="preencoded.png"/>
+          <p:cNvPr id="28" name="Picture 27" descr="A white background with black text&#10;&#10;AI-generated content may be incorrect.">
+            <a:extLst>
+              <a:ext uri="{FF2B5EF4-FFF2-40B4-BE49-F238E27FC236}">
+                <a16:creationId xmlns:a16="http://schemas.microsoft.com/office/drawing/2014/main" id="{3CF248F8-40D1-979F-1AF3-0E498B8D081E}"/>
+              </a:ext>
+            </a:extLst>
+          </p:cNvPr>
           <p:cNvPicPr>
             <a:picLocks noChangeAspect="1"/>
           </p:cNvPicPr>
@@ -7577,469 +8143,20 @@
         </p:nvPicPr>
         <p:blipFill>
           <a:blip r:embed="rId3"/>
-          <a:srcRect/>
-          <a:stretch/>
+          <a:stretch>
+            <a:fillRect/>
+          </a:stretch>
         </p:blipFill>
         <p:spPr>
           <a:xfrm>
-            <a:off x="1097280" y="1417319"/>
-            <a:ext cx="6858000" cy="2036501"/>
+            <a:off x="1665514" y="1406415"/>
+            <a:ext cx="5812971" cy="2045658"/>
           </a:xfrm>
           <a:prstGeom prst="rect">
             <a:avLst/>
           </a:prstGeom>
         </p:spPr>
       </p:pic>
-      <p:sp>
-        <p:nvSpPr>
-          <p:cNvPr id="6" name="Text 3"/>
-          <p:cNvSpPr/>
-          <p:nvPr/>
-        </p:nvSpPr>
-        <p:spPr>
-          <a:xfrm>
-            <a:off x="548640" y="3546566"/>
-            <a:ext cx="3657600" cy="411480"/>
-          </a:xfrm>
-          <a:prstGeom prst="rect">
-            <a:avLst/>
-          </a:prstGeom>
-          <a:noFill/>
-          <a:ln/>
-        </p:spPr>
-        <p:txBody>
-          <a:bodyPr wrap="square" lIns="0" tIns="0" rIns="0" bIns="0" rtlCol="0" anchor="ctr"/>
-          <a:lstStyle/>
-          <a:p>
-            <a:pPr marL="0" indent="0">
-              <a:buNone/>
-            </a:pPr>
-            <a:r>
-              <a:rPr lang="en-US" sz="1600" b="1" dirty="0">
-                <a:solidFill>
-                  <a:srgbClr val="0B1D3A"/>
-                </a:solidFill>
-                <a:latin typeface="Trebuchet MS" pitchFamily="34" charset="0"/>
-                <a:ea typeface="Trebuchet MS" pitchFamily="34" charset="-122"/>
-                <a:cs typeface="Trebuchet MS" pitchFamily="34" charset="-120"/>
-              </a:rPr>
-              <a:t>Обмеження моделі</a:t>
-            </a:r>
-            <a:endParaRPr lang="en-US" sz="1600" dirty="0"/>
-          </a:p>
-        </p:txBody>
-      </p:sp>
-      <p:sp>
-        <p:nvSpPr>
-          <p:cNvPr id="7" name="Shape 4"/>
-          <p:cNvSpPr/>
-          <p:nvPr/>
-        </p:nvSpPr>
-        <p:spPr>
-          <a:xfrm>
-            <a:off x="640080" y="4050792"/>
-            <a:ext cx="201168" cy="201168"/>
-          </a:xfrm>
-          <a:prstGeom prst="ellipse">
-            <a:avLst/>
-          </a:prstGeom>
-          <a:solidFill>
-            <a:srgbClr val="14B8A6"/>
-          </a:solidFill>
-          <a:ln/>
-        </p:spPr>
-      </p:sp>
-      <p:sp>
-        <p:nvSpPr>
-          <p:cNvPr id="8" name="Text 5"/>
-          <p:cNvSpPr/>
-          <p:nvPr/>
-        </p:nvSpPr>
-        <p:spPr>
-          <a:xfrm>
-            <a:off x="640080" y="4050792"/>
-            <a:ext cx="201168" cy="201168"/>
-          </a:xfrm>
-          <a:prstGeom prst="rect">
-            <a:avLst/>
-          </a:prstGeom>
-          <a:noFill/>
-          <a:ln/>
-        </p:spPr>
-        <p:txBody>
-          <a:bodyPr wrap="square" lIns="0" tIns="0" rIns="0" bIns="0" rtlCol="0" anchor="ctr"/>
-          <a:lstStyle/>
-          <a:p>
-            <a:pPr marL="0" indent="0" algn="ctr">
-              <a:buNone/>
-            </a:pPr>
-            <a:r>
-              <a:rPr lang="en-US" sz="900" b="1" dirty="0">
-                <a:solidFill>
-                  <a:srgbClr val="FFFFFF"/>
-                </a:solidFill>
-                <a:latin typeface="Calibri" pitchFamily="34" charset="0"/>
-                <a:ea typeface="Calibri" pitchFamily="34" charset="-122"/>
-                <a:cs typeface="Calibri" pitchFamily="34" charset="-120"/>
-              </a:rPr>
-              <a:t>1</a:t>
-            </a:r>
-            <a:endParaRPr lang="en-US" sz="900" dirty="0"/>
-          </a:p>
-        </p:txBody>
-      </p:sp>
-      <p:sp>
-        <p:nvSpPr>
-          <p:cNvPr id="9" name="Text 6"/>
-          <p:cNvSpPr/>
-          <p:nvPr/>
-        </p:nvSpPr>
-        <p:spPr>
-          <a:xfrm>
-            <a:off x="960120" y="4023360"/>
-            <a:ext cx="1371600" cy="256032"/>
-          </a:xfrm>
-          <a:prstGeom prst="rect">
-            <a:avLst/>
-          </a:prstGeom>
-          <a:noFill/>
-          <a:ln/>
-        </p:spPr>
-        <p:txBody>
-          <a:bodyPr wrap="square" lIns="0" tIns="0" rIns="0" bIns="0" rtlCol="0" anchor="ctr"/>
-          <a:lstStyle/>
-          <a:p>
-            <a:pPr marL="0" indent="0">
-              <a:buNone/>
-            </a:pPr>
-            <a:r>
-              <a:rPr lang="en-US" sz="1200" b="1" dirty="0">
-                <a:solidFill>
-                  <a:srgbClr val="0B1D3A"/>
-                </a:solidFill>
-                <a:latin typeface="Trebuchet MS" pitchFamily="34" charset="0"/>
-                <a:ea typeface="Trebuchet MS" pitchFamily="34" charset="-122"/>
-                <a:cs typeface="Trebuchet MS" pitchFamily="34" charset="-120"/>
-              </a:rPr>
-              <a:t>Місткість</a:t>
-            </a:r>
-            <a:endParaRPr lang="en-US" sz="1200" dirty="0"/>
-          </a:p>
-        </p:txBody>
-      </p:sp>
-      <p:sp>
-        <p:nvSpPr>
-          <p:cNvPr id="10" name="Text 7"/>
-          <p:cNvSpPr/>
-          <p:nvPr/>
-        </p:nvSpPr>
-        <p:spPr>
-          <a:xfrm>
-            <a:off x="2194560" y="4023360"/>
-            <a:ext cx="5943600" cy="256032"/>
-          </a:xfrm>
-          <a:prstGeom prst="rect">
-            <a:avLst/>
-          </a:prstGeom>
-          <a:noFill/>
-          <a:ln/>
-        </p:spPr>
-        <p:txBody>
-          <a:bodyPr wrap="square" lIns="0" tIns="0" rIns="0" bIns="0" rtlCol="0" anchor="ctr"/>
-          <a:lstStyle/>
-          <a:p>
-            <a:pPr marL="0" indent="0">
-              <a:buNone/>
-            </a:pPr>
-            <a:r>
-              <a:rPr lang="en-US" sz="1100" dirty="0">
-                <a:solidFill>
-                  <a:srgbClr val="1E293B"/>
-                </a:solidFill>
-                <a:latin typeface="Calibri" pitchFamily="34" charset="0"/>
-                <a:ea typeface="Calibri" pitchFamily="34" charset="-122"/>
-                <a:cs typeface="Calibri" pitchFamily="34" charset="-120"/>
-              </a:rPr>
-              <a:t>Сумарна вага вантажів у кожному ТЗ ≤ ліміт Q</a:t>
-            </a:r>
-            <a:endParaRPr lang="en-US" sz="1100" dirty="0"/>
-          </a:p>
-        </p:txBody>
-      </p:sp>
-      <p:sp>
-        <p:nvSpPr>
-          <p:cNvPr id="11" name="Shape 8"/>
-          <p:cNvSpPr/>
-          <p:nvPr/>
-        </p:nvSpPr>
-        <p:spPr>
-          <a:xfrm>
-            <a:off x="640080" y="4379976"/>
-            <a:ext cx="201168" cy="201168"/>
-          </a:xfrm>
-          <a:prstGeom prst="ellipse">
-            <a:avLst/>
-          </a:prstGeom>
-          <a:solidFill>
-            <a:srgbClr val="14B8A6"/>
-          </a:solidFill>
-          <a:ln/>
-        </p:spPr>
-      </p:sp>
-      <p:sp>
-        <p:nvSpPr>
-          <p:cNvPr id="12" name="Text 9"/>
-          <p:cNvSpPr/>
-          <p:nvPr/>
-        </p:nvSpPr>
-        <p:spPr>
-          <a:xfrm>
-            <a:off x="640080" y="4379976"/>
-            <a:ext cx="201168" cy="201168"/>
-          </a:xfrm>
-          <a:prstGeom prst="rect">
-            <a:avLst/>
-          </a:prstGeom>
-          <a:noFill/>
-          <a:ln/>
-        </p:spPr>
-        <p:txBody>
-          <a:bodyPr wrap="square" lIns="0" tIns="0" rIns="0" bIns="0" rtlCol="0" anchor="ctr"/>
-          <a:lstStyle/>
-          <a:p>
-            <a:pPr marL="0" indent="0" algn="ctr">
-              <a:buNone/>
-            </a:pPr>
-            <a:r>
-              <a:rPr lang="en-US" sz="900" b="1" dirty="0">
-                <a:solidFill>
-                  <a:srgbClr val="FFFFFF"/>
-                </a:solidFill>
-                <a:latin typeface="Calibri" pitchFamily="34" charset="0"/>
-                <a:ea typeface="Calibri" pitchFamily="34" charset="-122"/>
-                <a:cs typeface="Calibri" pitchFamily="34" charset="-120"/>
-              </a:rPr>
-              <a:t>2</a:t>
-            </a:r>
-            <a:endParaRPr lang="en-US" sz="900" dirty="0"/>
-          </a:p>
-        </p:txBody>
-      </p:sp>
-      <p:sp>
-        <p:nvSpPr>
-          <p:cNvPr id="13" name="Text 10"/>
-          <p:cNvSpPr/>
-          <p:nvPr/>
-        </p:nvSpPr>
-        <p:spPr>
-          <a:xfrm>
-            <a:off x="960120" y="4352544"/>
-            <a:ext cx="1371600" cy="256032"/>
-          </a:xfrm>
-          <a:prstGeom prst="rect">
-            <a:avLst/>
-          </a:prstGeom>
-          <a:noFill/>
-          <a:ln/>
-        </p:spPr>
-        <p:txBody>
-          <a:bodyPr wrap="square" lIns="0" tIns="0" rIns="0" bIns="0" rtlCol="0" anchor="ctr"/>
-          <a:lstStyle/>
-          <a:p>
-            <a:pPr marL="0" indent="0">
-              <a:buNone/>
-            </a:pPr>
-            <a:r>
-              <a:rPr lang="en-US" sz="1200" b="1" dirty="0">
-                <a:solidFill>
-                  <a:srgbClr val="0B1D3A"/>
-                </a:solidFill>
-                <a:latin typeface="Trebuchet MS" pitchFamily="34" charset="0"/>
-                <a:ea typeface="Trebuchet MS" pitchFamily="34" charset="-122"/>
-                <a:cs typeface="Trebuchet MS" pitchFamily="34" charset="-120"/>
-              </a:rPr>
-              <a:t>Часові вікна</a:t>
-            </a:r>
-            <a:endParaRPr lang="en-US" sz="1200" dirty="0"/>
-          </a:p>
-        </p:txBody>
-      </p:sp>
-      <p:sp>
-        <p:nvSpPr>
-          <p:cNvPr id="14" name="Text 11"/>
-          <p:cNvSpPr/>
-          <p:nvPr/>
-        </p:nvSpPr>
-        <p:spPr>
-          <a:xfrm>
-            <a:off x="2194560" y="4352544"/>
-            <a:ext cx="5943600" cy="256032"/>
-          </a:xfrm>
-          <a:prstGeom prst="rect">
-            <a:avLst/>
-          </a:prstGeom>
-          <a:noFill/>
-          <a:ln/>
-        </p:spPr>
-        <p:txBody>
-          <a:bodyPr wrap="square" lIns="0" tIns="0" rIns="0" bIns="0" rtlCol="0" anchor="ctr"/>
-          <a:lstStyle/>
-          <a:p>
-            <a:pPr marL="0" indent="0">
-              <a:buNone/>
-            </a:pPr>
-            <a:r>
-              <a:rPr lang="en-US" sz="1100" dirty="0">
-                <a:solidFill>
-                  <a:srgbClr val="1E293B"/>
-                </a:solidFill>
-                <a:latin typeface="Calibri" pitchFamily="34" charset="0"/>
-                <a:ea typeface="Calibri" pitchFamily="34" charset="-122"/>
-                <a:cs typeface="Calibri" pitchFamily="34" charset="-120"/>
-              </a:rPr>
-              <a:t>Прибуття у вузол i в межах [eᵢ, lᵢ]</a:t>
-            </a:r>
-            <a:endParaRPr lang="en-US" sz="1100" dirty="0"/>
-          </a:p>
-        </p:txBody>
-      </p:sp>
-      <p:sp>
-        <p:nvSpPr>
-          <p:cNvPr id="15" name="Shape 12"/>
-          <p:cNvSpPr/>
-          <p:nvPr/>
-        </p:nvSpPr>
-        <p:spPr>
-          <a:xfrm>
-            <a:off x="640080" y="4709160"/>
-            <a:ext cx="201168" cy="201168"/>
-          </a:xfrm>
-          <a:prstGeom prst="ellipse">
-            <a:avLst/>
-          </a:prstGeom>
-          <a:solidFill>
-            <a:srgbClr val="14B8A6"/>
-          </a:solidFill>
-          <a:ln/>
-        </p:spPr>
-      </p:sp>
-      <p:sp>
-        <p:nvSpPr>
-          <p:cNvPr id="16" name="Text 13"/>
-          <p:cNvSpPr/>
-          <p:nvPr/>
-        </p:nvSpPr>
-        <p:spPr>
-          <a:xfrm>
-            <a:off x="640080" y="4709160"/>
-            <a:ext cx="201168" cy="201168"/>
-          </a:xfrm>
-          <a:prstGeom prst="rect">
-            <a:avLst/>
-          </a:prstGeom>
-          <a:noFill/>
-          <a:ln/>
-        </p:spPr>
-        <p:txBody>
-          <a:bodyPr wrap="square" lIns="0" tIns="0" rIns="0" bIns="0" rtlCol="0" anchor="ctr"/>
-          <a:lstStyle/>
-          <a:p>
-            <a:pPr marL="0" indent="0" algn="ctr">
-              <a:buNone/>
-            </a:pPr>
-            <a:r>
-              <a:rPr lang="en-US" sz="900" b="1" dirty="0">
-                <a:solidFill>
-                  <a:srgbClr val="FFFFFF"/>
-                </a:solidFill>
-                <a:latin typeface="Calibri" pitchFamily="34" charset="0"/>
-                <a:ea typeface="Calibri" pitchFamily="34" charset="-122"/>
-                <a:cs typeface="Calibri" pitchFamily="34" charset="-120"/>
-              </a:rPr>
-              <a:t>3</a:t>
-            </a:r>
-            <a:endParaRPr lang="en-US" sz="900" dirty="0"/>
-          </a:p>
-        </p:txBody>
-      </p:sp>
-      <p:sp>
-        <p:nvSpPr>
-          <p:cNvPr id="17" name="Text 14"/>
-          <p:cNvSpPr/>
-          <p:nvPr/>
-        </p:nvSpPr>
-        <p:spPr>
-          <a:xfrm>
-            <a:off x="960120" y="4681728"/>
-            <a:ext cx="1371600" cy="256032"/>
-          </a:xfrm>
-          <a:prstGeom prst="rect">
-            <a:avLst/>
-          </a:prstGeom>
-          <a:noFill/>
-          <a:ln/>
-        </p:spPr>
-        <p:txBody>
-          <a:bodyPr wrap="square" lIns="0" tIns="0" rIns="0" bIns="0" rtlCol="0" anchor="ctr"/>
-          <a:lstStyle/>
-          <a:p>
-            <a:pPr marL="0" indent="0">
-              <a:buNone/>
-            </a:pPr>
-            <a:r>
-              <a:rPr lang="en-US" sz="1200" b="1" dirty="0">
-                <a:solidFill>
-                  <a:srgbClr val="0B1D3A"/>
-                </a:solidFill>
-                <a:latin typeface="Trebuchet MS" pitchFamily="34" charset="0"/>
-                <a:ea typeface="Trebuchet MS" pitchFamily="34" charset="-122"/>
-                <a:cs typeface="Trebuchet MS" pitchFamily="34" charset="-120"/>
-              </a:rPr>
-              <a:t>Зв'язність</a:t>
-            </a:r>
-            <a:endParaRPr lang="en-US" sz="1200" dirty="0"/>
-          </a:p>
-        </p:txBody>
-      </p:sp>
-      <p:sp>
-        <p:nvSpPr>
-          <p:cNvPr id="18" name="Text 15"/>
-          <p:cNvSpPr/>
-          <p:nvPr/>
-        </p:nvSpPr>
-        <p:spPr>
-          <a:xfrm>
-            <a:off x="2194560" y="4681728"/>
-            <a:ext cx="5943600" cy="256032"/>
-          </a:xfrm>
-          <a:prstGeom prst="rect">
-            <a:avLst/>
-          </a:prstGeom>
-          <a:noFill/>
-          <a:ln/>
-        </p:spPr>
-        <p:txBody>
-          <a:bodyPr wrap="square" lIns="0" tIns="0" rIns="0" bIns="0" rtlCol="0" anchor="ctr"/>
-          <a:lstStyle/>
-          <a:p>
-            <a:pPr marL="0" indent="0">
-              <a:buNone/>
-            </a:pPr>
-            <a:r>
-              <a:rPr lang="en-US" sz="1100" dirty="0">
-                <a:solidFill>
-                  <a:srgbClr val="1E293B"/>
-                </a:solidFill>
-                <a:latin typeface="Calibri" pitchFamily="34" charset="0"/>
-                <a:ea typeface="Calibri" pitchFamily="34" charset="-122"/>
-                <a:cs typeface="Calibri" pitchFamily="34" charset="-120"/>
-              </a:rPr>
-              <a:t>Кожен клієнт відвіданий рівно один раз</a:t>
-            </a:r>
-            <a:endParaRPr lang="en-US" sz="1100" dirty="0"/>
-          </a:p>
-        </p:txBody>
-      </p:sp>
     </p:spTree>
   </p:cSld>
   <p:clrMapOvr>

--- a/Звіт/Практика/Презентація_практика_Ніколаєв_1.pptx
+++ b/Звіт/Практика/Презентація_практика_Ніколаєв_1.pptx
@@ -2,7 +2,7 @@
 <file path=ppt/presentation.xml><?xml version="1.0" encoding="utf-8"?>
 <p:presentation xmlns:a="http://schemas.openxmlformats.org/drawingml/2006/main" xmlns:r="http://schemas.openxmlformats.org/officeDocument/2006/relationships" xmlns:p="http://schemas.openxmlformats.org/presentationml/2006/main" saveSubsetFonts="1" autoCompressPictures="0">
   <p:sldMasterIdLst>
-    <p:sldMasterId id="2147483648" r:id="rId1"/>
+    <p:sldMasterId id="2147483663" r:id="rId1"/>
   </p:sldMasterIdLst>
   <p:notesMasterIdLst>
     <p:notesMasterId r:id="rId15"/>
@@ -25,7 +25,10 @@
   <p:sldSz cx="9144000" cy="5143500" type="screen16x9"/>
   <p:notesSz cx="5143500" cy="9144000"/>
   <p:defaultTextStyle>
-    <a:lvl1pPr marL="0" algn="l" defTabSz="914400" rtl="0" eaLnBrk="1" latinLnBrk="0" hangingPunct="1">
+    <a:defPPr>
+      <a:defRPr lang="en-US"/>
+    </a:defPPr>
+    <a:lvl1pPr marL="0" algn="l" defTabSz="457200" rtl="0" eaLnBrk="1" latinLnBrk="0" hangingPunct="1">
       <a:defRPr sz="1800" kern="1200">
         <a:solidFill>
           <a:schemeClr val="tx1"/>
@@ -35,7 +38,7 @@
         <a:cs typeface="+mn-cs"/>
       </a:defRPr>
     </a:lvl1pPr>
-    <a:lvl2pPr marL="457200" algn="l" defTabSz="914400" rtl="0" eaLnBrk="1" latinLnBrk="0" hangingPunct="1">
+    <a:lvl2pPr marL="457200" algn="l" defTabSz="457200" rtl="0" eaLnBrk="1" latinLnBrk="0" hangingPunct="1">
       <a:defRPr sz="1800" kern="1200">
         <a:solidFill>
           <a:schemeClr val="tx1"/>
@@ -45,7 +48,7 @@
         <a:cs typeface="+mn-cs"/>
       </a:defRPr>
     </a:lvl2pPr>
-    <a:lvl3pPr marL="914400" algn="l" defTabSz="914400" rtl="0" eaLnBrk="1" latinLnBrk="0" hangingPunct="1">
+    <a:lvl3pPr marL="914400" algn="l" defTabSz="457200" rtl="0" eaLnBrk="1" latinLnBrk="0" hangingPunct="1">
       <a:defRPr sz="1800" kern="1200">
         <a:solidFill>
           <a:schemeClr val="tx1"/>
@@ -55,7 +58,7 @@
         <a:cs typeface="+mn-cs"/>
       </a:defRPr>
     </a:lvl3pPr>
-    <a:lvl4pPr marL="1371600" algn="l" defTabSz="914400" rtl="0" eaLnBrk="1" latinLnBrk="0" hangingPunct="1">
+    <a:lvl4pPr marL="1371600" algn="l" defTabSz="457200" rtl="0" eaLnBrk="1" latinLnBrk="0" hangingPunct="1">
       <a:defRPr sz="1800" kern="1200">
         <a:solidFill>
           <a:schemeClr val="tx1"/>
@@ -65,7 +68,7 @@
         <a:cs typeface="+mn-cs"/>
       </a:defRPr>
     </a:lvl4pPr>
-    <a:lvl5pPr marL="1828800" algn="l" defTabSz="914400" rtl="0" eaLnBrk="1" latinLnBrk="0" hangingPunct="1">
+    <a:lvl5pPr marL="1828800" algn="l" defTabSz="457200" rtl="0" eaLnBrk="1" latinLnBrk="0" hangingPunct="1">
       <a:defRPr sz="1800" kern="1200">
         <a:solidFill>
           <a:schemeClr val="tx1"/>
@@ -75,7 +78,7 @@
         <a:cs typeface="+mn-cs"/>
       </a:defRPr>
     </a:lvl5pPr>
-    <a:lvl6pPr marL="2286000" algn="l" defTabSz="914400" rtl="0" eaLnBrk="1" latinLnBrk="0" hangingPunct="1">
+    <a:lvl6pPr marL="2286000" algn="l" defTabSz="457200" rtl="0" eaLnBrk="1" latinLnBrk="0" hangingPunct="1">
       <a:defRPr sz="1800" kern="1200">
         <a:solidFill>
           <a:schemeClr val="tx1"/>
@@ -85,7 +88,7 @@
         <a:cs typeface="+mn-cs"/>
       </a:defRPr>
     </a:lvl6pPr>
-    <a:lvl7pPr marL="2743200" algn="l" defTabSz="914400" rtl="0" eaLnBrk="1" latinLnBrk="0" hangingPunct="1">
+    <a:lvl7pPr marL="2743200" algn="l" defTabSz="457200" rtl="0" eaLnBrk="1" latinLnBrk="0" hangingPunct="1">
       <a:defRPr sz="1800" kern="1200">
         <a:solidFill>
           <a:schemeClr val="tx1"/>
@@ -95,7 +98,7 @@
         <a:cs typeface="+mn-cs"/>
       </a:defRPr>
     </a:lvl7pPr>
-    <a:lvl8pPr marL="3200400" algn="l" defTabSz="914400" rtl="0" eaLnBrk="1" latinLnBrk="0" hangingPunct="1">
+    <a:lvl8pPr marL="3200400" algn="l" defTabSz="457200" rtl="0" eaLnBrk="1" latinLnBrk="0" hangingPunct="1">
       <a:defRPr sz="1800" kern="1200">
         <a:solidFill>
           <a:schemeClr val="tx1"/>
@@ -105,7 +108,7 @@
         <a:cs typeface="+mn-cs"/>
       </a:defRPr>
     </a:lvl8pPr>
-    <a:lvl9pPr marL="3657600" algn="l" defTabSz="914400" rtl="0" eaLnBrk="1" latinLnBrk="0" hangingPunct="1">
+    <a:lvl9pPr marL="3657600" algn="l" defTabSz="457200" rtl="0" eaLnBrk="1" latinLnBrk="0" hangingPunct="1">
       <a:defRPr sz="1800" kern="1200">
         <a:solidFill>
           <a:schemeClr val="tx1"/>
@@ -1342,7 +1345,552 @@
 </file>
 
 <file path=ppt/slideLayouts/slideLayout1.xml><?xml version="1.0" encoding="utf-8"?>
-<p:sldLayout xmlns:a="http://schemas.openxmlformats.org/drawingml/2006/main" xmlns:r="http://schemas.openxmlformats.org/officeDocument/2006/relationships" xmlns:p="http://schemas.openxmlformats.org/presentationml/2006/main" preserve="1">
+<p:sldLayout xmlns:a="http://schemas.openxmlformats.org/drawingml/2006/main" xmlns:r="http://schemas.openxmlformats.org/officeDocument/2006/relationships" xmlns:p="http://schemas.openxmlformats.org/presentationml/2006/main" type="title" preserve="1">
+  <p:cSld name="Title Slide">
+    <p:spTree>
+      <p:nvGrpSpPr>
+        <p:cNvPr id="1" name=""/>
+        <p:cNvGrpSpPr/>
+        <p:nvPr/>
+      </p:nvGrpSpPr>
+      <p:grpSpPr>
+        <a:xfrm>
+          <a:off x="0" y="0"/>
+          <a:ext cx="0" cy="0"/>
+          <a:chOff x="0" y="0"/>
+          <a:chExt cx="0" cy="0"/>
+        </a:xfrm>
+      </p:grpSpPr>
+      <p:sp>
+        <p:nvSpPr>
+          <p:cNvPr id="2" name="Title 1"/>
+          <p:cNvSpPr>
+            <a:spLocks noGrp="1"/>
+          </p:cNvSpPr>
+          <p:nvPr>
+            <p:ph type="ctrTitle"/>
+          </p:nvPr>
+        </p:nvSpPr>
+        <p:spPr>
+          <a:xfrm>
+            <a:off x="1143000" y="841772"/>
+            <a:ext cx="6858000" cy="1790700"/>
+          </a:xfrm>
+        </p:spPr>
+        <p:txBody>
+          <a:bodyPr anchor="b"/>
+          <a:lstStyle>
+            <a:lvl1pPr algn="ctr">
+              <a:defRPr sz="4500"/>
+            </a:lvl1pPr>
+          </a:lstStyle>
+          <a:p>
+            <a:r>
+              <a:rPr lang="en-US"/>
+              <a:t>Click to edit Master title style</a:t>
+            </a:r>
+            <a:endParaRPr lang="en-US" dirty="0"/>
+          </a:p>
+        </p:txBody>
+      </p:sp>
+      <p:sp>
+        <p:nvSpPr>
+          <p:cNvPr id="3" name="Subtitle 2"/>
+          <p:cNvSpPr>
+            <a:spLocks noGrp="1"/>
+          </p:cNvSpPr>
+          <p:nvPr>
+            <p:ph type="subTitle" idx="1"/>
+          </p:nvPr>
+        </p:nvSpPr>
+        <p:spPr>
+          <a:xfrm>
+            <a:off x="1143000" y="2701528"/>
+            <a:ext cx="6858000" cy="1241822"/>
+          </a:xfrm>
+        </p:spPr>
+        <p:txBody>
+          <a:bodyPr/>
+          <a:lstStyle>
+            <a:lvl1pPr marL="0" indent="0" algn="ctr">
+              <a:buNone/>
+              <a:defRPr sz="1800"/>
+            </a:lvl1pPr>
+            <a:lvl2pPr marL="342900" indent="0" algn="ctr">
+              <a:buNone/>
+              <a:defRPr sz="1500"/>
+            </a:lvl2pPr>
+            <a:lvl3pPr marL="685800" indent="0" algn="ctr">
+              <a:buNone/>
+              <a:defRPr sz="1350"/>
+            </a:lvl3pPr>
+            <a:lvl4pPr marL="1028700" indent="0" algn="ctr">
+              <a:buNone/>
+              <a:defRPr sz="1200"/>
+            </a:lvl4pPr>
+            <a:lvl5pPr marL="1371600" indent="0" algn="ctr">
+              <a:buNone/>
+              <a:defRPr sz="1200"/>
+            </a:lvl5pPr>
+            <a:lvl6pPr marL="1714500" indent="0" algn="ctr">
+              <a:buNone/>
+              <a:defRPr sz="1200"/>
+            </a:lvl6pPr>
+            <a:lvl7pPr marL="2057400" indent="0" algn="ctr">
+              <a:buNone/>
+              <a:defRPr sz="1200"/>
+            </a:lvl7pPr>
+            <a:lvl8pPr marL="2400300" indent="0" algn="ctr">
+              <a:buNone/>
+              <a:defRPr sz="1200"/>
+            </a:lvl8pPr>
+            <a:lvl9pPr marL="2743200" indent="0" algn="ctr">
+              <a:buNone/>
+              <a:defRPr sz="1200"/>
+            </a:lvl9pPr>
+          </a:lstStyle>
+          <a:p>
+            <a:r>
+              <a:rPr lang="en-US"/>
+              <a:t>Click to edit Master subtitle style</a:t>
+            </a:r>
+            <a:endParaRPr lang="en-US" dirty="0"/>
+          </a:p>
+        </p:txBody>
+      </p:sp>
+      <p:sp>
+        <p:nvSpPr>
+          <p:cNvPr id="4" name="Date Placeholder 3"/>
+          <p:cNvSpPr>
+            <a:spLocks noGrp="1"/>
+          </p:cNvSpPr>
+          <p:nvPr>
+            <p:ph type="dt" sz="half" idx="10"/>
+          </p:nvPr>
+        </p:nvSpPr>
+        <p:spPr/>
+        <p:txBody>
+          <a:bodyPr/>
+          <a:lstStyle/>
+          <a:p>
+            <a:fld id="{C764DE79-268F-4C1A-8933-263129D2AF90}" type="datetimeFigureOut">
+              <a:rPr lang="en-US" smtClean="0"/>
+              <a:t>5/7/2026</a:t>
+            </a:fld>
+            <a:endParaRPr lang="en-US" dirty="0"/>
+          </a:p>
+        </p:txBody>
+      </p:sp>
+      <p:sp>
+        <p:nvSpPr>
+          <p:cNvPr id="5" name="Footer Placeholder 4"/>
+          <p:cNvSpPr>
+            <a:spLocks noGrp="1"/>
+          </p:cNvSpPr>
+          <p:nvPr>
+            <p:ph type="ftr" sz="quarter" idx="11"/>
+          </p:nvPr>
+        </p:nvSpPr>
+        <p:spPr/>
+        <p:txBody>
+          <a:bodyPr/>
+          <a:lstStyle/>
+          <a:p>
+            <a:endParaRPr lang="en-US" dirty="0"/>
+          </a:p>
+        </p:txBody>
+      </p:sp>
+      <p:sp>
+        <p:nvSpPr>
+          <p:cNvPr id="6" name="Slide Number Placeholder 5"/>
+          <p:cNvSpPr>
+            <a:spLocks noGrp="1"/>
+          </p:cNvSpPr>
+          <p:nvPr>
+            <p:ph type="sldNum" sz="quarter" idx="12"/>
+          </p:nvPr>
+        </p:nvSpPr>
+        <p:spPr/>
+        <p:txBody>
+          <a:bodyPr/>
+          <a:lstStyle/>
+          <a:p>
+            <a:fld id="{48F63A3B-78C7-47BE-AE5E-E10140E04643}" type="slidenum">
+              <a:rPr lang="en-US" smtClean="0"/>
+              <a:t>‹#›</a:t>
+            </a:fld>
+            <a:endParaRPr lang="en-US" dirty="0"/>
+          </a:p>
+        </p:txBody>
+      </p:sp>
+    </p:spTree>
+    <p:extLst>
+      <p:ext uri="{BB962C8B-B14F-4D97-AF65-F5344CB8AC3E}">
+        <p14:creationId xmlns:p14="http://schemas.microsoft.com/office/powerpoint/2010/main" val="1121633703"/>
+      </p:ext>
+    </p:extLst>
+  </p:cSld>
+  <p:clrMapOvr>
+    <a:masterClrMapping/>
+  </p:clrMapOvr>
+  <p:hf sldNum="0" hdr="0" ftr="0" dt="0"/>
+</p:sldLayout>
+</file>
+
+<file path=ppt/slideLayouts/slideLayout10.xml><?xml version="1.0" encoding="utf-8"?>
+<p:sldLayout xmlns:a="http://schemas.openxmlformats.org/drawingml/2006/main" xmlns:r="http://schemas.openxmlformats.org/officeDocument/2006/relationships" xmlns:p="http://schemas.openxmlformats.org/presentationml/2006/main" type="vertTx" preserve="1">
+  <p:cSld name="Title and Vertical Text">
+    <p:spTree>
+      <p:nvGrpSpPr>
+        <p:cNvPr id="1" name=""/>
+        <p:cNvGrpSpPr/>
+        <p:nvPr/>
+      </p:nvGrpSpPr>
+      <p:grpSpPr>
+        <a:xfrm>
+          <a:off x="0" y="0"/>
+          <a:ext cx="0" cy="0"/>
+          <a:chOff x="0" y="0"/>
+          <a:chExt cx="0" cy="0"/>
+        </a:xfrm>
+      </p:grpSpPr>
+      <p:sp>
+        <p:nvSpPr>
+          <p:cNvPr id="2" name="Title 1"/>
+          <p:cNvSpPr>
+            <a:spLocks noGrp="1"/>
+          </p:cNvSpPr>
+          <p:nvPr>
+            <p:ph type="title"/>
+          </p:nvPr>
+        </p:nvSpPr>
+        <p:spPr/>
+        <p:txBody>
+          <a:bodyPr/>
+          <a:lstStyle/>
+          <a:p>
+            <a:r>
+              <a:rPr lang="en-US"/>
+              <a:t>Click to edit Master title style</a:t>
+            </a:r>
+            <a:endParaRPr lang="en-US" dirty="0"/>
+          </a:p>
+        </p:txBody>
+      </p:sp>
+      <p:sp>
+        <p:nvSpPr>
+          <p:cNvPr id="3" name="Vertical Text Placeholder 2"/>
+          <p:cNvSpPr>
+            <a:spLocks noGrp="1"/>
+          </p:cNvSpPr>
+          <p:nvPr>
+            <p:ph type="body" orient="vert" idx="1"/>
+          </p:nvPr>
+        </p:nvSpPr>
+        <p:spPr/>
+        <p:txBody>
+          <a:bodyPr vert="eaVert"/>
+          <a:lstStyle/>
+          <a:p>
+            <a:pPr lvl="0"/>
+            <a:r>
+              <a:rPr lang="en-US"/>
+              <a:t>Click to edit Master text styles</a:t>
+            </a:r>
+          </a:p>
+          <a:p>
+            <a:pPr lvl="1"/>
+            <a:r>
+              <a:rPr lang="en-US"/>
+              <a:t>Second level</a:t>
+            </a:r>
+          </a:p>
+          <a:p>
+            <a:pPr lvl="2"/>
+            <a:r>
+              <a:rPr lang="en-US"/>
+              <a:t>Third level</a:t>
+            </a:r>
+          </a:p>
+          <a:p>
+            <a:pPr lvl="3"/>
+            <a:r>
+              <a:rPr lang="en-US"/>
+              <a:t>Fourth level</a:t>
+            </a:r>
+          </a:p>
+          <a:p>
+            <a:pPr lvl="4"/>
+            <a:r>
+              <a:rPr lang="en-US"/>
+              <a:t>Fifth level</a:t>
+            </a:r>
+            <a:endParaRPr lang="en-US" dirty="0"/>
+          </a:p>
+        </p:txBody>
+      </p:sp>
+      <p:sp>
+        <p:nvSpPr>
+          <p:cNvPr id="4" name="Date Placeholder 3"/>
+          <p:cNvSpPr>
+            <a:spLocks noGrp="1"/>
+          </p:cNvSpPr>
+          <p:nvPr>
+            <p:ph type="dt" sz="half" idx="10"/>
+          </p:nvPr>
+        </p:nvSpPr>
+        <p:spPr/>
+        <p:txBody>
+          <a:bodyPr/>
+          <a:lstStyle/>
+          <a:p>
+            <a:fld id="{C764DE79-268F-4C1A-8933-263129D2AF90}" type="datetimeFigureOut">
+              <a:rPr lang="en-US" smtClean="0"/>
+              <a:t>5/7/2026</a:t>
+            </a:fld>
+            <a:endParaRPr lang="en-US" dirty="0"/>
+          </a:p>
+        </p:txBody>
+      </p:sp>
+      <p:sp>
+        <p:nvSpPr>
+          <p:cNvPr id="5" name="Footer Placeholder 4"/>
+          <p:cNvSpPr>
+            <a:spLocks noGrp="1"/>
+          </p:cNvSpPr>
+          <p:nvPr>
+            <p:ph type="ftr" sz="quarter" idx="11"/>
+          </p:nvPr>
+        </p:nvSpPr>
+        <p:spPr/>
+        <p:txBody>
+          <a:bodyPr/>
+          <a:lstStyle/>
+          <a:p>
+            <a:endParaRPr lang="en-US" dirty="0"/>
+          </a:p>
+        </p:txBody>
+      </p:sp>
+      <p:sp>
+        <p:nvSpPr>
+          <p:cNvPr id="6" name="Slide Number Placeholder 5"/>
+          <p:cNvSpPr>
+            <a:spLocks noGrp="1"/>
+          </p:cNvSpPr>
+          <p:nvPr>
+            <p:ph type="sldNum" sz="quarter" idx="12"/>
+          </p:nvPr>
+        </p:nvSpPr>
+        <p:spPr/>
+        <p:txBody>
+          <a:bodyPr/>
+          <a:lstStyle/>
+          <a:p>
+            <a:fld id="{48F63A3B-78C7-47BE-AE5E-E10140E04643}" type="slidenum">
+              <a:rPr lang="en-US" smtClean="0"/>
+              <a:t>‹#›</a:t>
+            </a:fld>
+            <a:endParaRPr lang="en-US" dirty="0"/>
+          </a:p>
+        </p:txBody>
+      </p:sp>
+    </p:spTree>
+    <p:extLst>
+      <p:ext uri="{BB962C8B-B14F-4D97-AF65-F5344CB8AC3E}">
+        <p14:creationId xmlns:p14="http://schemas.microsoft.com/office/powerpoint/2010/main" val="2405250897"/>
+      </p:ext>
+    </p:extLst>
+  </p:cSld>
+  <p:clrMapOvr>
+    <a:masterClrMapping/>
+  </p:clrMapOvr>
+  <p:hf sldNum="0" hdr="0" ftr="0" dt="0"/>
+</p:sldLayout>
+</file>
+
+<file path=ppt/slideLayouts/slideLayout11.xml><?xml version="1.0" encoding="utf-8"?>
+<p:sldLayout xmlns:a="http://schemas.openxmlformats.org/drawingml/2006/main" xmlns:r="http://schemas.openxmlformats.org/officeDocument/2006/relationships" xmlns:p="http://schemas.openxmlformats.org/presentationml/2006/main" type="vertTitleAndTx" preserve="1">
+  <p:cSld name="Vertical Title and Text">
+    <p:spTree>
+      <p:nvGrpSpPr>
+        <p:cNvPr id="1" name=""/>
+        <p:cNvGrpSpPr/>
+        <p:nvPr/>
+      </p:nvGrpSpPr>
+      <p:grpSpPr>
+        <a:xfrm>
+          <a:off x="0" y="0"/>
+          <a:ext cx="0" cy="0"/>
+          <a:chOff x="0" y="0"/>
+          <a:chExt cx="0" cy="0"/>
+        </a:xfrm>
+      </p:grpSpPr>
+      <p:sp>
+        <p:nvSpPr>
+          <p:cNvPr id="2" name="Vertical Title 1"/>
+          <p:cNvSpPr>
+            <a:spLocks noGrp="1"/>
+          </p:cNvSpPr>
+          <p:nvPr>
+            <p:ph type="title" orient="vert"/>
+          </p:nvPr>
+        </p:nvSpPr>
+        <p:spPr>
+          <a:xfrm>
+            <a:off x="6543675" y="273844"/>
+            <a:ext cx="1971675" cy="4358879"/>
+          </a:xfrm>
+        </p:spPr>
+        <p:txBody>
+          <a:bodyPr vert="eaVert"/>
+          <a:lstStyle/>
+          <a:p>
+            <a:r>
+              <a:rPr lang="en-US"/>
+              <a:t>Click to edit Master title style</a:t>
+            </a:r>
+            <a:endParaRPr lang="en-US" dirty="0"/>
+          </a:p>
+        </p:txBody>
+      </p:sp>
+      <p:sp>
+        <p:nvSpPr>
+          <p:cNvPr id="3" name="Vertical Text Placeholder 2"/>
+          <p:cNvSpPr>
+            <a:spLocks noGrp="1"/>
+          </p:cNvSpPr>
+          <p:nvPr>
+            <p:ph type="body" orient="vert" idx="1"/>
+          </p:nvPr>
+        </p:nvSpPr>
+        <p:spPr>
+          <a:xfrm>
+            <a:off x="628650" y="273844"/>
+            <a:ext cx="5800725" cy="4358879"/>
+          </a:xfrm>
+        </p:spPr>
+        <p:txBody>
+          <a:bodyPr vert="eaVert"/>
+          <a:lstStyle/>
+          <a:p>
+            <a:pPr lvl="0"/>
+            <a:r>
+              <a:rPr lang="en-US"/>
+              <a:t>Click to edit Master text styles</a:t>
+            </a:r>
+          </a:p>
+          <a:p>
+            <a:pPr lvl="1"/>
+            <a:r>
+              <a:rPr lang="en-US"/>
+              <a:t>Second level</a:t>
+            </a:r>
+          </a:p>
+          <a:p>
+            <a:pPr lvl="2"/>
+            <a:r>
+              <a:rPr lang="en-US"/>
+              <a:t>Third level</a:t>
+            </a:r>
+          </a:p>
+          <a:p>
+            <a:pPr lvl="3"/>
+            <a:r>
+              <a:rPr lang="en-US"/>
+              <a:t>Fourth level</a:t>
+            </a:r>
+          </a:p>
+          <a:p>
+            <a:pPr lvl="4"/>
+            <a:r>
+              <a:rPr lang="en-US"/>
+              <a:t>Fifth level</a:t>
+            </a:r>
+            <a:endParaRPr lang="en-US" dirty="0"/>
+          </a:p>
+        </p:txBody>
+      </p:sp>
+      <p:sp>
+        <p:nvSpPr>
+          <p:cNvPr id="4" name="Date Placeholder 3"/>
+          <p:cNvSpPr>
+            <a:spLocks noGrp="1"/>
+          </p:cNvSpPr>
+          <p:nvPr>
+            <p:ph type="dt" sz="half" idx="10"/>
+          </p:nvPr>
+        </p:nvSpPr>
+        <p:spPr/>
+        <p:txBody>
+          <a:bodyPr/>
+          <a:lstStyle/>
+          <a:p>
+            <a:fld id="{C764DE79-268F-4C1A-8933-263129D2AF90}" type="datetimeFigureOut">
+              <a:rPr lang="en-US" smtClean="0"/>
+              <a:t>5/7/2026</a:t>
+            </a:fld>
+            <a:endParaRPr lang="en-US" dirty="0"/>
+          </a:p>
+        </p:txBody>
+      </p:sp>
+      <p:sp>
+        <p:nvSpPr>
+          <p:cNvPr id="5" name="Footer Placeholder 4"/>
+          <p:cNvSpPr>
+            <a:spLocks noGrp="1"/>
+          </p:cNvSpPr>
+          <p:nvPr>
+            <p:ph type="ftr" sz="quarter" idx="11"/>
+          </p:nvPr>
+        </p:nvSpPr>
+        <p:spPr/>
+        <p:txBody>
+          <a:bodyPr/>
+          <a:lstStyle/>
+          <a:p>
+            <a:endParaRPr lang="en-US" dirty="0"/>
+          </a:p>
+        </p:txBody>
+      </p:sp>
+      <p:sp>
+        <p:nvSpPr>
+          <p:cNvPr id="6" name="Slide Number Placeholder 5"/>
+          <p:cNvSpPr>
+            <a:spLocks noGrp="1"/>
+          </p:cNvSpPr>
+          <p:nvPr>
+            <p:ph type="sldNum" sz="quarter" idx="12"/>
+          </p:nvPr>
+        </p:nvSpPr>
+        <p:spPr/>
+        <p:txBody>
+          <a:bodyPr/>
+          <a:lstStyle/>
+          <a:p>
+            <a:fld id="{48F63A3B-78C7-47BE-AE5E-E10140E04643}" type="slidenum">
+              <a:rPr lang="en-US" smtClean="0"/>
+              <a:t>‹#›</a:t>
+            </a:fld>
+            <a:endParaRPr lang="en-US" dirty="0"/>
+          </a:p>
+        </p:txBody>
+      </p:sp>
+    </p:spTree>
+    <p:extLst>
+      <p:ext uri="{BB962C8B-B14F-4D97-AF65-F5344CB8AC3E}">
+        <p14:creationId xmlns:p14="http://schemas.microsoft.com/office/powerpoint/2010/main" val="51270485"/>
+      </p:ext>
+    </p:extLst>
+  </p:cSld>
+  <p:clrMapOvr>
+    <a:masterClrMapping/>
+  </p:clrMapOvr>
+  <p:hf sldNum="0" hdr="0" ftr="0" dt="0"/>
+</p:sldLayout>
+</file>
+
+<file path=ppt/slideLayouts/slideLayout12.xml><?xml version="1.0" encoding="utf-8"?>
+<p:sldLayout xmlns:a="http://schemas.openxmlformats.org/drawingml/2006/main" xmlns:r="http://schemas.openxmlformats.org/officeDocument/2006/relationships" xmlns:p="http://schemas.openxmlformats.org/presentationml/2006/main">
   <p:cSld name="DEFAULT">
     <p:bg>
       <p:bgRef idx="1001">
@@ -1364,10 +1912,1785 @@
         </a:xfrm>
       </p:grpSpPr>
     </p:spTree>
+    <p:extLst>
+      <p:ext uri="{BB962C8B-B14F-4D97-AF65-F5344CB8AC3E}">
+        <p14:creationId xmlns:p14="http://schemas.microsoft.com/office/powerpoint/2010/main" val="1576913940"/>
+      </p:ext>
+    </p:extLst>
   </p:cSld>
   <p:clrMapOvr>
     <a:masterClrMapping/>
   </p:clrMapOvr>
+</p:sldLayout>
+</file>
+
+<file path=ppt/slideLayouts/slideLayout2.xml><?xml version="1.0" encoding="utf-8"?>
+<p:sldLayout xmlns:a="http://schemas.openxmlformats.org/drawingml/2006/main" xmlns:r="http://schemas.openxmlformats.org/officeDocument/2006/relationships" xmlns:p="http://schemas.openxmlformats.org/presentationml/2006/main" type="obj" preserve="1">
+  <p:cSld name="Title and Content">
+    <p:spTree>
+      <p:nvGrpSpPr>
+        <p:cNvPr id="1" name=""/>
+        <p:cNvGrpSpPr/>
+        <p:nvPr/>
+      </p:nvGrpSpPr>
+      <p:grpSpPr>
+        <a:xfrm>
+          <a:off x="0" y="0"/>
+          <a:ext cx="0" cy="0"/>
+          <a:chOff x="0" y="0"/>
+          <a:chExt cx="0" cy="0"/>
+        </a:xfrm>
+      </p:grpSpPr>
+      <p:sp>
+        <p:nvSpPr>
+          <p:cNvPr id="2" name="Title 1"/>
+          <p:cNvSpPr>
+            <a:spLocks noGrp="1"/>
+          </p:cNvSpPr>
+          <p:nvPr>
+            <p:ph type="title"/>
+          </p:nvPr>
+        </p:nvSpPr>
+        <p:spPr/>
+        <p:txBody>
+          <a:bodyPr/>
+          <a:lstStyle/>
+          <a:p>
+            <a:r>
+              <a:rPr lang="en-US"/>
+              <a:t>Click to edit Master title style</a:t>
+            </a:r>
+            <a:endParaRPr lang="en-US" dirty="0"/>
+          </a:p>
+        </p:txBody>
+      </p:sp>
+      <p:sp>
+        <p:nvSpPr>
+          <p:cNvPr id="3" name="Content Placeholder 2"/>
+          <p:cNvSpPr>
+            <a:spLocks noGrp="1"/>
+          </p:cNvSpPr>
+          <p:nvPr>
+            <p:ph idx="1"/>
+          </p:nvPr>
+        </p:nvSpPr>
+        <p:spPr/>
+        <p:txBody>
+          <a:bodyPr/>
+          <a:lstStyle/>
+          <a:p>
+            <a:pPr lvl="0"/>
+            <a:r>
+              <a:rPr lang="en-US"/>
+              <a:t>Click to edit Master text styles</a:t>
+            </a:r>
+          </a:p>
+          <a:p>
+            <a:pPr lvl="1"/>
+            <a:r>
+              <a:rPr lang="en-US"/>
+              <a:t>Second level</a:t>
+            </a:r>
+          </a:p>
+          <a:p>
+            <a:pPr lvl="2"/>
+            <a:r>
+              <a:rPr lang="en-US"/>
+              <a:t>Third level</a:t>
+            </a:r>
+          </a:p>
+          <a:p>
+            <a:pPr lvl="3"/>
+            <a:r>
+              <a:rPr lang="en-US"/>
+              <a:t>Fourth level</a:t>
+            </a:r>
+          </a:p>
+          <a:p>
+            <a:pPr lvl="4"/>
+            <a:r>
+              <a:rPr lang="en-US"/>
+              <a:t>Fifth level</a:t>
+            </a:r>
+            <a:endParaRPr lang="en-US" dirty="0"/>
+          </a:p>
+        </p:txBody>
+      </p:sp>
+      <p:sp>
+        <p:nvSpPr>
+          <p:cNvPr id="4" name="Date Placeholder 3"/>
+          <p:cNvSpPr>
+            <a:spLocks noGrp="1"/>
+          </p:cNvSpPr>
+          <p:nvPr>
+            <p:ph type="dt" sz="half" idx="10"/>
+          </p:nvPr>
+        </p:nvSpPr>
+        <p:spPr/>
+        <p:txBody>
+          <a:bodyPr/>
+          <a:lstStyle/>
+          <a:p>
+            <a:fld id="{C764DE79-268F-4C1A-8933-263129D2AF90}" type="datetimeFigureOut">
+              <a:rPr lang="en-US" smtClean="0"/>
+              <a:t>5/7/2026</a:t>
+            </a:fld>
+            <a:endParaRPr lang="en-US" dirty="0"/>
+          </a:p>
+        </p:txBody>
+      </p:sp>
+      <p:sp>
+        <p:nvSpPr>
+          <p:cNvPr id="5" name="Footer Placeholder 4"/>
+          <p:cNvSpPr>
+            <a:spLocks noGrp="1"/>
+          </p:cNvSpPr>
+          <p:nvPr>
+            <p:ph type="ftr" sz="quarter" idx="11"/>
+          </p:nvPr>
+        </p:nvSpPr>
+        <p:spPr/>
+        <p:txBody>
+          <a:bodyPr/>
+          <a:lstStyle/>
+          <a:p>
+            <a:endParaRPr lang="en-US" dirty="0"/>
+          </a:p>
+        </p:txBody>
+      </p:sp>
+      <p:sp>
+        <p:nvSpPr>
+          <p:cNvPr id="6" name="Slide Number Placeholder 5"/>
+          <p:cNvSpPr>
+            <a:spLocks noGrp="1"/>
+          </p:cNvSpPr>
+          <p:nvPr>
+            <p:ph type="sldNum" sz="quarter" idx="12"/>
+          </p:nvPr>
+        </p:nvSpPr>
+        <p:spPr/>
+        <p:txBody>
+          <a:bodyPr/>
+          <a:lstStyle/>
+          <a:p>
+            <a:fld id="{48F63A3B-78C7-47BE-AE5E-E10140E04643}" type="slidenum">
+              <a:rPr lang="en-US" smtClean="0"/>
+              <a:t>‹#›</a:t>
+            </a:fld>
+            <a:endParaRPr lang="en-US" dirty="0"/>
+          </a:p>
+        </p:txBody>
+      </p:sp>
+    </p:spTree>
+    <p:extLst>
+      <p:ext uri="{BB962C8B-B14F-4D97-AF65-F5344CB8AC3E}">
+        <p14:creationId xmlns:p14="http://schemas.microsoft.com/office/powerpoint/2010/main" val="347408008"/>
+      </p:ext>
+    </p:extLst>
+  </p:cSld>
+  <p:clrMapOvr>
+    <a:masterClrMapping/>
+  </p:clrMapOvr>
+  <p:hf sldNum="0" hdr="0" ftr="0" dt="0"/>
+</p:sldLayout>
+</file>
+
+<file path=ppt/slideLayouts/slideLayout3.xml><?xml version="1.0" encoding="utf-8"?>
+<p:sldLayout xmlns:a="http://schemas.openxmlformats.org/drawingml/2006/main" xmlns:r="http://schemas.openxmlformats.org/officeDocument/2006/relationships" xmlns:p="http://schemas.openxmlformats.org/presentationml/2006/main" type="secHead" preserve="1">
+  <p:cSld name="Section Header">
+    <p:spTree>
+      <p:nvGrpSpPr>
+        <p:cNvPr id="1" name=""/>
+        <p:cNvGrpSpPr/>
+        <p:nvPr/>
+      </p:nvGrpSpPr>
+      <p:grpSpPr>
+        <a:xfrm>
+          <a:off x="0" y="0"/>
+          <a:ext cx="0" cy="0"/>
+          <a:chOff x="0" y="0"/>
+          <a:chExt cx="0" cy="0"/>
+        </a:xfrm>
+      </p:grpSpPr>
+      <p:sp>
+        <p:nvSpPr>
+          <p:cNvPr id="2" name="Title 1"/>
+          <p:cNvSpPr>
+            <a:spLocks noGrp="1"/>
+          </p:cNvSpPr>
+          <p:nvPr>
+            <p:ph type="title"/>
+          </p:nvPr>
+        </p:nvSpPr>
+        <p:spPr>
+          <a:xfrm>
+            <a:off x="623888" y="1282304"/>
+            <a:ext cx="7886700" cy="2139553"/>
+          </a:xfrm>
+        </p:spPr>
+        <p:txBody>
+          <a:bodyPr anchor="b"/>
+          <a:lstStyle>
+            <a:lvl1pPr>
+              <a:defRPr sz="4500"/>
+            </a:lvl1pPr>
+          </a:lstStyle>
+          <a:p>
+            <a:r>
+              <a:rPr lang="en-US"/>
+              <a:t>Click to edit Master title style</a:t>
+            </a:r>
+            <a:endParaRPr lang="en-US" dirty="0"/>
+          </a:p>
+        </p:txBody>
+      </p:sp>
+      <p:sp>
+        <p:nvSpPr>
+          <p:cNvPr id="3" name="Text Placeholder 2"/>
+          <p:cNvSpPr>
+            <a:spLocks noGrp="1"/>
+          </p:cNvSpPr>
+          <p:nvPr>
+            <p:ph type="body" idx="1"/>
+          </p:nvPr>
+        </p:nvSpPr>
+        <p:spPr>
+          <a:xfrm>
+            <a:off x="623888" y="3442098"/>
+            <a:ext cx="7886700" cy="1125140"/>
+          </a:xfrm>
+        </p:spPr>
+        <p:txBody>
+          <a:bodyPr/>
+          <a:lstStyle>
+            <a:lvl1pPr marL="0" indent="0">
+              <a:buNone/>
+              <a:defRPr sz="1800">
+                <a:solidFill>
+                  <a:schemeClr val="tx1">
+                    <a:tint val="75000"/>
+                  </a:schemeClr>
+                </a:solidFill>
+              </a:defRPr>
+            </a:lvl1pPr>
+            <a:lvl2pPr marL="342900" indent="0">
+              <a:buNone/>
+              <a:defRPr sz="1500">
+                <a:solidFill>
+                  <a:schemeClr val="tx1">
+                    <a:tint val="75000"/>
+                  </a:schemeClr>
+                </a:solidFill>
+              </a:defRPr>
+            </a:lvl2pPr>
+            <a:lvl3pPr marL="685800" indent="0">
+              <a:buNone/>
+              <a:defRPr sz="1350">
+                <a:solidFill>
+                  <a:schemeClr val="tx1">
+                    <a:tint val="75000"/>
+                  </a:schemeClr>
+                </a:solidFill>
+              </a:defRPr>
+            </a:lvl3pPr>
+            <a:lvl4pPr marL="1028700" indent="0">
+              <a:buNone/>
+              <a:defRPr sz="1200">
+                <a:solidFill>
+                  <a:schemeClr val="tx1">
+                    <a:tint val="75000"/>
+                  </a:schemeClr>
+                </a:solidFill>
+              </a:defRPr>
+            </a:lvl4pPr>
+            <a:lvl5pPr marL="1371600" indent="0">
+              <a:buNone/>
+              <a:defRPr sz="1200">
+                <a:solidFill>
+                  <a:schemeClr val="tx1">
+                    <a:tint val="75000"/>
+                  </a:schemeClr>
+                </a:solidFill>
+              </a:defRPr>
+            </a:lvl5pPr>
+            <a:lvl6pPr marL="1714500" indent="0">
+              <a:buNone/>
+              <a:defRPr sz="1200">
+                <a:solidFill>
+                  <a:schemeClr val="tx1">
+                    <a:tint val="75000"/>
+                  </a:schemeClr>
+                </a:solidFill>
+              </a:defRPr>
+            </a:lvl6pPr>
+            <a:lvl7pPr marL="2057400" indent="0">
+              <a:buNone/>
+              <a:defRPr sz="1200">
+                <a:solidFill>
+                  <a:schemeClr val="tx1">
+                    <a:tint val="75000"/>
+                  </a:schemeClr>
+                </a:solidFill>
+              </a:defRPr>
+            </a:lvl7pPr>
+            <a:lvl8pPr marL="2400300" indent="0">
+              <a:buNone/>
+              <a:defRPr sz="1200">
+                <a:solidFill>
+                  <a:schemeClr val="tx1">
+                    <a:tint val="75000"/>
+                  </a:schemeClr>
+                </a:solidFill>
+              </a:defRPr>
+            </a:lvl8pPr>
+            <a:lvl9pPr marL="2743200" indent="0">
+              <a:buNone/>
+              <a:defRPr sz="1200">
+                <a:solidFill>
+                  <a:schemeClr val="tx1">
+                    <a:tint val="75000"/>
+                  </a:schemeClr>
+                </a:solidFill>
+              </a:defRPr>
+            </a:lvl9pPr>
+          </a:lstStyle>
+          <a:p>
+            <a:pPr lvl="0"/>
+            <a:r>
+              <a:rPr lang="en-US"/>
+              <a:t>Click to edit Master text styles</a:t>
+            </a:r>
+          </a:p>
+        </p:txBody>
+      </p:sp>
+      <p:sp>
+        <p:nvSpPr>
+          <p:cNvPr id="4" name="Date Placeholder 3"/>
+          <p:cNvSpPr>
+            <a:spLocks noGrp="1"/>
+          </p:cNvSpPr>
+          <p:nvPr>
+            <p:ph type="dt" sz="half" idx="10"/>
+          </p:nvPr>
+        </p:nvSpPr>
+        <p:spPr/>
+        <p:txBody>
+          <a:bodyPr/>
+          <a:lstStyle/>
+          <a:p>
+            <a:fld id="{C764DE79-268F-4C1A-8933-263129D2AF90}" type="datetimeFigureOut">
+              <a:rPr lang="en-US" smtClean="0"/>
+              <a:t>5/7/2026</a:t>
+            </a:fld>
+            <a:endParaRPr lang="en-US" dirty="0"/>
+          </a:p>
+        </p:txBody>
+      </p:sp>
+      <p:sp>
+        <p:nvSpPr>
+          <p:cNvPr id="5" name="Footer Placeholder 4"/>
+          <p:cNvSpPr>
+            <a:spLocks noGrp="1"/>
+          </p:cNvSpPr>
+          <p:nvPr>
+            <p:ph type="ftr" sz="quarter" idx="11"/>
+          </p:nvPr>
+        </p:nvSpPr>
+        <p:spPr/>
+        <p:txBody>
+          <a:bodyPr/>
+          <a:lstStyle/>
+          <a:p>
+            <a:endParaRPr lang="en-US" dirty="0"/>
+          </a:p>
+        </p:txBody>
+      </p:sp>
+      <p:sp>
+        <p:nvSpPr>
+          <p:cNvPr id="6" name="Slide Number Placeholder 5"/>
+          <p:cNvSpPr>
+            <a:spLocks noGrp="1"/>
+          </p:cNvSpPr>
+          <p:nvPr>
+            <p:ph type="sldNum" sz="quarter" idx="12"/>
+          </p:nvPr>
+        </p:nvSpPr>
+        <p:spPr/>
+        <p:txBody>
+          <a:bodyPr/>
+          <a:lstStyle/>
+          <a:p>
+            <a:fld id="{48F63A3B-78C7-47BE-AE5E-E10140E04643}" type="slidenum">
+              <a:rPr lang="en-US" smtClean="0"/>
+              <a:t>‹#›</a:t>
+            </a:fld>
+            <a:endParaRPr lang="en-US" dirty="0"/>
+          </a:p>
+        </p:txBody>
+      </p:sp>
+    </p:spTree>
+    <p:extLst>
+      <p:ext uri="{BB962C8B-B14F-4D97-AF65-F5344CB8AC3E}">
+        <p14:creationId xmlns:p14="http://schemas.microsoft.com/office/powerpoint/2010/main" val="3603639789"/>
+      </p:ext>
+    </p:extLst>
+  </p:cSld>
+  <p:clrMapOvr>
+    <a:masterClrMapping/>
+  </p:clrMapOvr>
+  <p:hf sldNum="0" hdr="0" ftr="0" dt="0"/>
+</p:sldLayout>
+</file>
+
+<file path=ppt/slideLayouts/slideLayout4.xml><?xml version="1.0" encoding="utf-8"?>
+<p:sldLayout xmlns:a="http://schemas.openxmlformats.org/drawingml/2006/main" xmlns:r="http://schemas.openxmlformats.org/officeDocument/2006/relationships" xmlns:p="http://schemas.openxmlformats.org/presentationml/2006/main" type="twoObj" preserve="1">
+  <p:cSld name="Two Content">
+    <p:spTree>
+      <p:nvGrpSpPr>
+        <p:cNvPr id="1" name=""/>
+        <p:cNvGrpSpPr/>
+        <p:nvPr/>
+      </p:nvGrpSpPr>
+      <p:grpSpPr>
+        <a:xfrm>
+          <a:off x="0" y="0"/>
+          <a:ext cx="0" cy="0"/>
+          <a:chOff x="0" y="0"/>
+          <a:chExt cx="0" cy="0"/>
+        </a:xfrm>
+      </p:grpSpPr>
+      <p:sp>
+        <p:nvSpPr>
+          <p:cNvPr id="2" name="Title 1"/>
+          <p:cNvSpPr>
+            <a:spLocks noGrp="1"/>
+          </p:cNvSpPr>
+          <p:nvPr>
+            <p:ph type="title"/>
+          </p:nvPr>
+        </p:nvSpPr>
+        <p:spPr/>
+        <p:txBody>
+          <a:bodyPr/>
+          <a:lstStyle/>
+          <a:p>
+            <a:r>
+              <a:rPr lang="en-US"/>
+              <a:t>Click to edit Master title style</a:t>
+            </a:r>
+            <a:endParaRPr lang="en-US" dirty="0"/>
+          </a:p>
+        </p:txBody>
+      </p:sp>
+      <p:sp>
+        <p:nvSpPr>
+          <p:cNvPr id="3" name="Content Placeholder 2"/>
+          <p:cNvSpPr>
+            <a:spLocks noGrp="1"/>
+          </p:cNvSpPr>
+          <p:nvPr>
+            <p:ph sz="half" idx="1"/>
+          </p:nvPr>
+        </p:nvSpPr>
+        <p:spPr>
+          <a:xfrm>
+            <a:off x="628650" y="1369219"/>
+            <a:ext cx="3886200" cy="3263504"/>
+          </a:xfrm>
+        </p:spPr>
+        <p:txBody>
+          <a:bodyPr/>
+          <a:lstStyle/>
+          <a:p>
+            <a:pPr lvl="0"/>
+            <a:r>
+              <a:rPr lang="en-US"/>
+              <a:t>Click to edit Master text styles</a:t>
+            </a:r>
+          </a:p>
+          <a:p>
+            <a:pPr lvl="1"/>
+            <a:r>
+              <a:rPr lang="en-US"/>
+              <a:t>Second level</a:t>
+            </a:r>
+          </a:p>
+          <a:p>
+            <a:pPr lvl="2"/>
+            <a:r>
+              <a:rPr lang="en-US"/>
+              <a:t>Third level</a:t>
+            </a:r>
+          </a:p>
+          <a:p>
+            <a:pPr lvl="3"/>
+            <a:r>
+              <a:rPr lang="en-US"/>
+              <a:t>Fourth level</a:t>
+            </a:r>
+          </a:p>
+          <a:p>
+            <a:pPr lvl="4"/>
+            <a:r>
+              <a:rPr lang="en-US"/>
+              <a:t>Fifth level</a:t>
+            </a:r>
+            <a:endParaRPr lang="en-US" dirty="0"/>
+          </a:p>
+        </p:txBody>
+      </p:sp>
+      <p:sp>
+        <p:nvSpPr>
+          <p:cNvPr id="4" name="Content Placeholder 3"/>
+          <p:cNvSpPr>
+            <a:spLocks noGrp="1"/>
+          </p:cNvSpPr>
+          <p:nvPr>
+            <p:ph sz="half" idx="2"/>
+          </p:nvPr>
+        </p:nvSpPr>
+        <p:spPr>
+          <a:xfrm>
+            <a:off x="4629150" y="1369219"/>
+            <a:ext cx="3886200" cy="3263504"/>
+          </a:xfrm>
+        </p:spPr>
+        <p:txBody>
+          <a:bodyPr/>
+          <a:lstStyle/>
+          <a:p>
+            <a:pPr lvl="0"/>
+            <a:r>
+              <a:rPr lang="en-US"/>
+              <a:t>Click to edit Master text styles</a:t>
+            </a:r>
+          </a:p>
+          <a:p>
+            <a:pPr lvl="1"/>
+            <a:r>
+              <a:rPr lang="en-US"/>
+              <a:t>Second level</a:t>
+            </a:r>
+          </a:p>
+          <a:p>
+            <a:pPr lvl="2"/>
+            <a:r>
+              <a:rPr lang="en-US"/>
+              <a:t>Third level</a:t>
+            </a:r>
+          </a:p>
+          <a:p>
+            <a:pPr lvl="3"/>
+            <a:r>
+              <a:rPr lang="en-US"/>
+              <a:t>Fourth level</a:t>
+            </a:r>
+          </a:p>
+          <a:p>
+            <a:pPr lvl="4"/>
+            <a:r>
+              <a:rPr lang="en-US"/>
+              <a:t>Fifth level</a:t>
+            </a:r>
+            <a:endParaRPr lang="en-US" dirty="0"/>
+          </a:p>
+        </p:txBody>
+      </p:sp>
+      <p:sp>
+        <p:nvSpPr>
+          <p:cNvPr id="5" name="Date Placeholder 4"/>
+          <p:cNvSpPr>
+            <a:spLocks noGrp="1"/>
+          </p:cNvSpPr>
+          <p:nvPr>
+            <p:ph type="dt" sz="half" idx="10"/>
+          </p:nvPr>
+        </p:nvSpPr>
+        <p:spPr/>
+        <p:txBody>
+          <a:bodyPr/>
+          <a:lstStyle/>
+          <a:p>
+            <a:fld id="{C764DE79-268F-4C1A-8933-263129D2AF90}" type="datetimeFigureOut">
+              <a:rPr lang="en-US" smtClean="0"/>
+              <a:t>5/7/2026</a:t>
+            </a:fld>
+            <a:endParaRPr lang="en-US" dirty="0"/>
+          </a:p>
+        </p:txBody>
+      </p:sp>
+      <p:sp>
+        <p:nvSpPr>
+          <p:cNvPr id="6" name="Footer Placeholder 5"/>
+          <p:cNvSpPr>
+            <a:spLocks noGrp="1"/>
+          </p:cNvSpPr>
+          <p:nvPr>
+            <p:ph type="ftr" sz="quarter" idx="11"/>
+          </p:nvPr>
+        </p:nvSpPr>
+        <p:spPr/>
+        <p:txBody>
+          <a:bodyPr/>
+          <a:lstStyle/>
+          <a:p>
+            <a:endParaRPr lang="en-US" dirty="0"/>
+          </a:p>
+        </p:txBody>
+      </p:sp>
+      <p:sp>
+        <p:nvSpPr>
+          <p:cNvPr id="7" name="Slide Number Placeholder 6"/>
+          <p:cNvSpPr>
+            <a:spLocks noGrp="1"/>
+          </p:cNvSpPr>
+          <p:nvPr>
+            <p:ph type="sldNum" sz="quarter" idx="12"/>
+          </p:nvPr>
+        </p:nvSpPr>
+        <p:spPr/>
+        <p:txBody>
+          <a:bodyPr/>
+          <a:lstStyle/>
+          <a:p>
+            <a:fld id="{48F63A3B-78C7-47BE-AE5E-E10140E04643}" type="slidenum">
+              <a:rPr lang="en-US" smtClean="0"/>
+              <a:t>‹#›</a:t>
+            </a:fld>
+            <a:endParaRPr lang="en-US" dirty="0"/>
+          </a:p>
+        </p:txBody>
+      </p:sp>
+    </p:spTree>
+    <p:extLst>
+      <p:ext uri="{BB962C8B-B14F-4D97-AF65-F5344CB8AC3E}">
+        <p14:creationId xmlns:p14="http://schemas.microsoft.com/office/powerpoint/2010/main" val="1797941665"/>
+      </p:ext>
+    </p:extLst>
+  </p:cSld>
+  <p:clrMapOvr>
+    <a:masterClrMapping/>
+  </p:clrMapOvr>
+  <p:hf sldNum="0" hdr="0" ftr="0" dt="0"/>
+</p:sldLayout>
+</file>
+
+<file path=ppt/slideLayouts/slideLayout5.xml><?xml version="1.0" encoding="utf-8"?>
+<p:sldLayout xmlns:a="http://schemas.openxmlformats.org/drawingml/2006/main" xmlns:r="http://schemas.openxmlformats.org/officeDocument/2006/relationships" xmlns:p="http://schemas.openxmlformats.org/presentationml/2006/main" type="twoTxTwoObj" preserve="1">
+  <p:cSld name="Comparison">
+    <p:spTree>
+      <p:nvGrpSpPr>
+        <p:cNvPr id="1" name=""/>
+        <p:cNvGrpSpPr/>
+        <p:nvPr/>
+      </p:nvGrpSpPr>
+      <p:grpSpPr>
+        <a:xfrm>
+          <a:off x="0" y="0"/>
+          <a:ext cx="0" cy="0"/>
+          <a:chOff x="0" y="0"/>
+          <a:chExt cx="0" cy="0"/>
+        </a:xfrm>
+      </p:grpSpPr>
+      <p:sp>
+        <p:nvSpPr>
+          <p:cNvPr id="2" name="Title 1"/>
+          <p:cNvSpPr>
+            <a:spLocks noGrp="1"/>
+          </p:cNvSpPr>
+          <p:nvPr>
+            <p:ph type="title"/>
+          </p:nvPr>
+        </p:nvSpPr>
+        <p:spPr>
+          <a:xfrm>
+            <a:off x="629841" y="273844"/>
+            <a:ext cx="7886700" cy="994172"/>
+          </a:xfrm>
+        </p:spPr>
+        <p:txBody>
+          <a:bodyPr/>
+          <a:lstStyle/>
+          <a:p>
+            <a:r>
+              <a:rPr lang="en-US"/>
+              <a:t>Click to edit Master title style</a:t>
+            </a:r>
+            <a:endParaRPr lang="en-US" dirty="0"/>
+          </a:p>
+        </p:txBody>
+      </p:sp>
+      <p:sp>
+        <p:nvSpPr>
+          <p:cNvPr id="3" name="Text Placeholder 2"/>
+          <p:cNvSpPr>
+            <a:spLocks noGrp="1"/>
+          </p:cNvSpPr>
+          <p:nvPr>
+            <p:ph type="body" idx="1"/>
+          </p:nvPr>
+        </p:nvSpPr>
+        <p:spPr>
+          <a:xfrm>
+            <a:off x="629842" y="1260872"/>
+            <a:ext cx="3868340" cy="617934"/>
+          </a:xfrm>
+        </p:spPr>
+        <p:txBody>
+          <a:bodyPr anchor="b"/>
+          <a:lstStyle>
+            <a:lvl1pPr marL="0" indent="0">
+              <a:buNone/>
+              <a:defRPr sz="1800" b="1"/>
+            </a:lvl1pPr>
+            <a:lvl2pPr marL="342900" indent="0">
+              <a:buNone/>
+              <a:defRPr sz="1500" b="1"/>
+            </a:lvl2pPr>
+            <a:lvl3pPr marL="685800" indent="0">
+              <a:buNone/>
+              <a:defRPr sz="1350" b="1"/>
+            </a:lvl3pPr>
+            <a:lvl4pPr marL="1028700" indent="0">
+              <a:buNone/>
+              <a:defRPr sz="1200" b="1"/>
+            </a:lvl4pPr>
+            <a:lvl5pPr marL="1371600" indent="0">
+              <a:buNone/>
+              <a:defRPr sz="1200" b="1"/>
+            </a:lvl5pPr>
+            <a:lvl6pPr marL="1714500" indent="0">
+              <a:buNone/>
+              <a:defRPr sz="1200" b="1"/>
+            </a:lvl6pPr>
+            <a:lvl7pPr marL="2057400" indent="0">
+              <a:buNone/>
+              <a:defRPr sz="1200" b="1"/>
+            </a:lvl7pPr>
+            <a:lvl8pPr marL="2400300" indent="0">
+              <a:buNone/>
+              <a:defRPr sz="1200" b="1"/>
+            </a:lvl8pPr>
+            <a:lvl9pPr marL="2743200" indent="0">
+              <a:buNone/>
+              <a:defRPr sz="1200" b="1"/>
+            </a:lvl9pPr>
+          </a:lstStyle>
+          <a:p>
+            <a:pPr lvl="0"/>
+            <a:r>
+              <a:rPr lang="en-US"/>
+              <a:t>Click to edit Master text styles</a:t>
+            </a:r>
+          </a:p>
+        </p:txBody>
+      </p:sp>
+      <p:sp>
+        <p:nvSpPr>
+          <p:cNvPr id="4" name="Content Placeholder 3"/>
+          <p:cNvSpPr>
+            <a:spLocks noGrp="1"/>
+          </p:cNvSpPr>
+          <p:nvPr>
+            <p:ph sz="half" idx="2"/>
+          </p:nvPr>
+        </p:nvSpPr>
+        <p:spPr>
+          <a:xfrm>
+            <a:off x="629842" y="1878806"/>
+            <a:ext cx="3868340" cy="2763441"/>
+          </a:xfrm>
+        </p:spPr>
+        <p:txBody>
+          <a:bodyPr/>
+          <a:lstStyle/>
+          <a:p>
+            <a:pPr lvl="0"/>
+            <a:r>
+              <a:rPr lang="en-US"/>
+              <a:t>Click to edit Master text styles</a:t>
+            </a:r>
+          </a:p>
+          <a:p>
+            <a:pPr lvl="1"/>
+            <a:r>
+              <a:rPr lang="en-US"/>
+              <a:t>Second level</a:t>
+            </a:r>
+          </a:p>
+          <a:p>
+            <a:pPr lvl="2"/>
+            <a:r>
+              <a:rPr lang="en-US"/>
+              <a:t>Third level</a:t>
+            </a:r>
+          </a:p>
+          <a:p>
+            <a:pPr lvl="3"/>
+            <a:r>
+              <a:rPr lang="en-US"/>
+              <a:t>Fourth level</a:t>
+            </a:r>
+          </a:p>
+          <a:p>
+            <a:pPr lvl="4"/>
+            <a:r>
+              <a:rPr lang="en-US"/>
+              <a:t>Fifth level</a:t>
+            </a:r>
+            <a:endParaRPr lang="en-US" dirty="0"/>
+          </a:p>
+        </p:txBody>
+      </p:sp>
+      <p:sp>
+        <p:nvSpPr>
+          <p:cNvPr id="5" name="Text Placeholder 4"/>
+          <p:cNvSpPr>
+            <a:spLocks noGrp="1"/>
+          </p:cNvSpPr>
+          <p:nvPr>
+            <p:ph type="body" sz="quarter" idx="3"/>
+          </p:nvPr>
+        </p:nvSpPr>
+        <p:spPr>
+          <a:xfrm>
+            <a:off x="4629150" y="1260872"/>
+            <a:ext cx="3887391" cy="617934"/>
+          </a:xfrm>
+        </p:spPr>
+        <p:txBody>
+          <a:bodyPr anchor="b"/>
+          <a:lstStyle>
+            <a:lvl1pPr marL="0" indent="0">
+              <a:buNone/>
+              <a:defRPr sz="1800" b="1"/>
+            </a:lvl1pPr>
+            <a:lvl2pPr marL="342900" indent="0">
+              <a:buNone/>
+              <a:defRPr sz="1500" b="1"/>
+            </a:lvl2pPr>
+            <a:lvl3pPr marL="685800" indent="0">
+              <a:buNone/>
+              <a:defRPr sz="1350" b="1"/>
+            </a:lvl3pPr>
+            <a:lvl4pPr marL="1028700" indent="0">
+              <a:buNone/>
+              <a:defRPr sz="1200" b="1"/>
+            </a:lvl4pPr>
+            <a:lvl5pPr marL="1371600" indent="0">
+              <a:buNone/>
+              <a:defRPr sz="1200" b="1"/>
+            </a:lvl5pPr>
+            <a:lvl6pPr marL="1714500" indent="0">
+              <a:buNone/>
+              <a:defRPr sz="1200" b="1"/>
+            </a:lvl6pPr>
+            <a:lvl7pPr marL="2057400" indent="0">
+              <a:buNone/>
+              <a:defRPr sz="1200" b="1"/>
+            </a:lvl7pPr>
+            <a:lvl8pPr marL="2400300" indent="0">
+              <a:buNone/>
+              <a:defRPr sz="1200" b="1"/>
+            </a:lvl8pPr>
+            <a:lvl9pPr marL="2743200" indent="0">
+              <a:buNone/>
+              <a:defRPr sz="1200" b="1"/>
+            </a:lvl9pPr>
+          </a:lstStyle>
+          <a:p>
+            <a:pPr lvl="0"/>
+            <a:r>
+              <a:rPr lang="en-US"/>
+              <a:t>Click to edit Master text styles</a:t>
+            </a:r>
+          </a:p>
+        </p:txBody>
+      </p:sp>
+      <p:sp>
+        <p:nvSpPr>
+          <p:cNvPr id="6" name="Content Placeholder 5"/>
+          <p:cNvSpPr>
+            <a:spLocks noGrp="1"/>
+          </p:cNvSpPr>
+          <p:nvPr>
+            <p:ph sz="quarter" idx="4"/>
+          </p:nvPr>
+        </p:nvSpPr>
+        <p:spPr>
+          <a:xfrm>
+            <a:off x="4629150" y="1878806"/>
+            <a:ext cx="3887391" cy="2763441"/>
+          </a:xfrm>
+        </p:spPr>
+        <p:txBody>
+          <a:bodyPr/>
+          <a:lstStyle/>
+          <a:p>
+            <a:pPr lvl="0"/>
+            <a:r>
+              <a:rPr lang="en-US"/>
+              <a:t>Click to edit Master text styles</a:t>
+            </a:r>
+          </a:p>
+          <a:p>
+            <a:pPr lvl="1"/>
+            <a:r>
+              <a:rPr lang="en-US"/>
+              <a:t>Second level</a:t>
+            </a:r>
+          </a:p>
+          <a:p>
+            <a:pPr lvl="2"/>
+            <a:r>
+              <a:rPr lang="en-US"/>
+              <a:t>Third level</a:t>
+            </a:r>
+          </a:p>
+          <a:p>
+            <a:pPr lvl="3"/>
+            <a:r>
+              <a:rPr lang="en-US"/>
+              <a:t>Fourth level</a:t>
+            </a:r>
+          </a:p>
+          <a:p>
+            <a:pPr lvl="4"/>
+            <a:r>
+              <a:rPr lang="en-US"/>
+              <a:t>Fifth level</a:t>
+            </a:r>
+            <a:endParaRPr lang="en-US" dirty="0"/>
+          </a:p>
+        </p:txBody>
+      </p:sp>
+      <p:sp>
+        <p:nvSpPr>
+          <p:cNvPr id="7" name="Date Placeholder 6"/>
+          <p:cNvSpPr>
+            <a:spLocks noGrp="1"/>
+          </p:cNvSpPr>
+          <p:nvPr>
+            <p:ph type="dt" sz="half" idx="10"/>
+          </p:nvPr>
+        </p:nvSpPr>
+        <p:spPr/>
+        <p:txBody>
+          <a:bodyPr/>
+          <a:lstStyle/>
+          <a:p>
+            <a:fld id="{C764DE79-268F-4C1A-8933-263129D2AF90}" type="datetimeFigureOut">
+              <a:rPr lang="en-US" smtClean="0"/>
+              <a:t>5/7/2026</a:t>
+            </a:fld>
+            <a:endParaRPr lang="en-US" dirty="0"/>
+          </a:p>
+        </p:txBody>
+      </p:sp>
+      <p:sp>
+        <p:nvSpPr>
+          <p:cNvPr id="8" name="Footer Placeholder 7"/>
+          <p:cNvSpPr>
+            <a:spLocks noGrp="1"/>
+          </p:cNvSpPr>
+          <p:nvPr>
+            <p:ph type="ftr" sz="quarter" idx="11"/>
+          </p:nvPr>
+        </p:nvSpPr>
+        <p:spPr/>
+        <p:txBody>
+          <a:bodyPr/>
+          <a:lstStyle/>
+          <a:p>
+            <a:endParaRPr lang="en-US" dirty="0"/>
+          </a:p>
+        </p:txBody>
+      </p:sp>
+      <p:sp>
+        <p:nvSpPr>
+          <p:cNvPr id="9" name="Slide Number Placeholder 8"/>
+          <p:cNvSpPr>
+            <a:spLocks noGrp="1"/>
+          </p:cNvSpPr>
+          <p:nvPr>
+            <p:ph type="sldNum" sz="quarter" idx="12"/>
+          </p:nvPr>
+        </p:nvSpPr>
+        <p:spPr/>
+        <p:txBody>
+          <a:bodyPr/>
+          <a:lstStyle/>
+          <a:p>
+            <a:fld id="{48F63A3B-78C7-47BE-AE5E-E10140E04643}" type="slidenum">
+              <a:rPr lang="en-US" smtClean="0"/>
+              <a:t>‹#›</a:t>
+            </a:fld>
+            <a:endParaRPr lang="en-US" dirty="0"/>
+          </a:p>
+        </p:txBody>
+      </p:sp>
+    </p:spTree>
+    <p:extLst>
+      <p:ext uri="{BB962C8B-B14F-4D97-AF65-F5344CB8AC3E}">
+        <p14:creationId xmlns:p14="http://schemas.microsoft.com/office/powerpoint/2010/main" val="1385857382"/>
+      </p:ext>
+    </p:extLst>
+  </p:cSld>
+  <p:clrMapOvr>
+    <a:masterClrMapping/>
+  </p:clrMapOvr>
+  <p:hf sldNum="0" hdr="0" ftr="0" dt="0"/>
+</p:sldLayout>
+</file>
+
+<file path=ppt/slideLayouts/slideLayout6.xml><?xml version="1.0" encoding="utf-8"?>
+<p:sldLayout xmlns:a="http://schemas.openxmlformats.org/drawingml/2006/main" xmlns:r="http://schemas.openxmlformats.org/officeDocument/2006/relationships" xmlns:p="http://schemas.openxmlformats.org/presentationml/2006/main" type="titleOnly" preserve="1">
+  <p:cSld name="Title Only">
+    <p:spTree>
+      <p:nvGrpSpPr>
+        <p:cNvPr id="1" name=""/>
+        <p:cNvGrpSpPr/>
+        <p:nvPr/>
+      </p:nvGrpSpPr>
+      <p:grpSpPr>
+        <a:xfrm>
+          <a:off x="0" y="0"/>
+          <a:ext cx="0" cy="0"/>
+          <a:chOff x="0" y="0"/>
+          <a:chExt cx="0" cy="0"/>
+        </a:xfrm>
+      </p:grpSpPr>
+      <p:sp>
+        <p:nvSpPr>
+          <p:cNvPr id="2" name="Title 1"/>
+          <p:cNvSpPr>
+            <a:spLocks noGrp="1"/>
+          </p:cNvSpPr>
+          <p:nvPr>
+            <p:ph type="title"/>
+          </p:nvPr>
+        </p:nvSpPr>
+        <p:spPr/>
+        <p:txBody>
+          <a:bodyPr/>
+          <a:lstStyle/>
+          <a:p>
+            <a:r>
+              <a:rPr lang="en-US"/>
+              <a:t>Click to edit Master title style</a:t>
+            </a:r>
+            <a:endParaRPr lang="en-US" dirty="0"/>
+          </a:p>
+        </p:txBody>
+      </p:sp>
+      <p:sp>
+        <p:nvSpPr>
+          <p:cNvPr id="3" name="Date Placeholder 2"/>
+          <p:cNvSpPr>
+            <a:spLocks noGrp="1"/>
+          </p:cNvSpPr>
+          <p:nvPr>
+            <p:ph type="dt" sz="half" idx="10"/>
+          </p:nvPr>
+        </p:nvSpPr>
+        <p:spPr/>
+        <p:txBody>
+          <a:bodyPr/>
+          <a:lstStyle/>
+          <a:p>
+            <a:fld id="{C764DE79-268F-4C1A-8933-263129D2AF90}" type="datetimeFigureOut">
+              <a:rPr lang="en-US" smtClean="0"/>
+              <a:t>5/7/2026</a:t>
+            </a:fld>
+            <a:endParaRPr lang="en-US" dirty="0"/>
+          </a:p>
+        </p:txBody>
+      </p:sp>
+      <p:sp>
+        <p:nvSpPr>
+          <p:cNvPr id="4" name="Footer Placeholder 3"/>
+          <p:cNvSpPr>
+            <a:spLocks noGrp="1"/>
+          </p:cNvSpPr>
+          <p:nvPr>
+            <p:ph type="ftr" sz="quarter" idx="11"/>
+          </p:nvPr>
+        </p:nvSpPr>
+        <p:spPr/>
+        <p:txBody>
+          <a:bodyPr/>
+          <a:lstStyle/>
+          <a:p>
+            <a:endParaRPr lang="en-US" dirty="0"/>
+          </a:p>
+        </p:txBody>
+      </p:sp>
+      <p:sp>
+        <p:nvSpPr>
+          <p:cNvPr id="5" name="Slide Number Placeholder 4"/>
+          <p:cNvSpPr>
+            <a:spLocks noGrp="1"/>
+          </p:cNvSpPr>
+          <p:nvPr>
+            <p:ph type="sldNum" sz="quarter" idx="12"/>
+          </p:nvPr>
+        </p:nvSpPr>
+        <p:spPr/>
+        <p:txBody>
+          <a:bodyPr/>
+          <a:lstStyle/>
+          <a:p>
+            <a:fld id="{48F63A3B-78C7-47BE-AE5E-E10140E04643}" type="slidenum">
+              <a:rPr lang="en-US" smtClean="0"/>
+              <a:t>‹#›</a:t>
+            </a:fld>
+            <a:endParaRPr lang="en-US" dirty="0"/>
+          </a:p>
+        </p:txBody>
+      </p:sp>
+    </p:spTree>
+    <p:extLst>
+      <p:ext uri="{BB962C8B-B14F-4D97-AF65-F5344CB8AC3E}">
+        <p14:creationId xmlns:p14="http://schemas.microsoft.com/office/powerpoint/2010/main" val="2337539670"/>
+      </p:ext>
+    </p:extLst>
+  </p:cSld>
+  <p:clrMapOvr>
+    <a:masterClrMapping/>
+  </p:clrMapOvr>
+  <p:hf sldNum="0" hdr="0" ftr="0" dt="0"/>
+</p:sldLayout>
+</file>
+
+<file path=ppt/slideLayouts/slideLayout7.xml><?xml version="1.0" encoding="utf-8"?>
+<p:sldLayout xmlns:a="http://schemas.openxmlformats.org/drawingml/2006/main" xmlns:r="http://schemas.openxmlformats.org/officeDocument/2006/relationships" xmlns:p="http://schemas.openxmlformats.org/presentationml/2006/main" type="blank" preserve="1">
+  <p:cSld name="Blank">
+    <p:spTree>
+      <p:nvGrpSpPr>
+        <p:cNvPr id="1" name=""/>
+        <p:cNvGrpSpPr/>
+        <p:nvPr/>
+      </p:nvGrpSpPr>
+      <p:grpSpPr>
+        <a:xfrm>
+          <a:off x="0" y="0"/>
+          <a:ext cx="0" cy="0"/>
+          <a:chOff x="0" y="0"/>
+          <a:chExt cx="0" cy="0"/>
+        </a:xfrm>
+      </p:grpSpPr>
+      <p:sp>
+        <p:nvSpPr>
+          <p:cNvPr id="2" name="Date Placeholder 1"/>
+          <p:cNvSpPr>
+            <a:spLocks noGrp="1"/>
+          </p:cNvSpPr>
+          <p:nvPr>
+            <p:ph type="dt" sz="half" idx="10"/>
+          </p:nvPr>
+        </p:nvSpPr>
+        <p:spPr/>
+        <p:txBody>
+          <a:bodyPr/>
+          <a:lstStyle/>
+          <a:p>
+            <a:fld id="{C764DE79-268F-4C1A-8933-263129D2AF90}" type="datetimeFigureOut">
+              <a:rPr lang="en-US" smtClean="0"/>
+              <a:t>5/7/2026</a:t>
+            </a:fld>
+            <a:endParaRPr lang="en-US" dirty="0"/>
+          </a:p>
+        </p:txBody>
+      </p:sp>
+      <p:sp>
+        <p:nvSpPr>
+          <p:cNvPr id="3" name="Footer Placeholder 2"/>
+          <p:cNvSpPr>
+            <a:spLocks noGrp="1"/>
+          </p:cNvSpPr>
+          <p:nvPr>
+            <p:ph type="ftr" sz="quarter" idx="11"/>
+          </p:nvPr>
+        </p:nvSpPr>
+        <p:spPr/>
+        <p:txBody>
+          <a:bodyPr/>
+          <a:lstStyle/>
+          <a:p>
+            <a:endParaRPr lang="en-US" dirty="0"/>
+          </a:p>
+        </p:txBody>
+      </p:sp>
+      <p:sp>
+        <p:nvSpPr>
+          <p:cNvPr id="4" name="Slide Number Placeholder 3"/>
+          <p:cNvSpPr>
+            <a:spLocks noGrp="1"/>
+          </p:cNvSpPr>
+          <p:nvPr>
+            <p:ph type="sldNum" sz="quarter" idx="12"/>
+          </p:nvPr>
+        </p:nvSpPr>
+        <p:spPr/>
+        <p:txBody>
+          <a:bodyPr/>
+          <a:lstStyle/>
+          <a:p>
+            <a:fld id="{48F63A3B-78C7-47BE-AE5E-E10140E04643}" type="slidenum">
+              <a:rPr lang="en-US" smtClean="0"/>
+              <a:t>‹#›</a:t>
+            </a:fld>
+            <a:endParaRPr lang="en-US" dirty="0"/>
+          </a:p>
+        </p:txBody>
+      </p:sp>
+    </p:spTree>
+    <p:extLst>
+      <p:ext uri="{BB962C8B-B14F-4D97-AF65-F5344CB8AC3E}">
+        <p14:creationId xmlns:p14="http://schemas.microsoft.com/office/powerpoint/2010/main" val="3643979531"/>
+      </p:ext>
+    </p:extLst>
+  </p:cSld>
+  <p:clrMapOvr>
+    <a:masterClrMapping/>
+  </p:clrMapOvr>
+  <p:hf sldNum="0" hdr="0" ftr="0" dt="0"/>
+</p:sldLayout>
+</file>
+
+<file path=ppt/slideLayouts/slideLayout8.xml><?xml version="1.0" encoding="utf-8"?>
+<p:sldLayout xmlns:a="http://schemas.openxmlformats.org/drawingml/2006/main" xmlns:r="http://schemas.openxmlformats.org/officeDocument/2006/relationships" xmlns:p="http://schemas.openxmlformats.org/presentationml/2006/main" type="objTx" preserve="1">
+  <p:cSld name="Content with Caption">
+    <p:spTree>
+      <p:nvGrpSpPr>
+        <p:cNvPr id="1" name=""/>
+        <p:cNvGrpSpPr/>
+        <p:nvPr/>
+      </p:nvGrpSpPr>
+      <p:grpSpPr>
+        <a:xfrm>
+          <a:off x="0" y="0"/>
+          <a:ext cx="0" cy="0"/>
+          <a:chOff x="0" y="0"/>
+          <a:chExt cx="0" cy="0"/>
+        </a:xfrm>
+      </p:grpSpPr>
+      <p:sp>
+        <p:nvSpPr>
+          <p:cNvPr id="2" name="Title 1"/>
+          <p:cNvSpPr>
+            <a:spLocks noGrp="1"/>
+          </p:cNvSpPr>
+          <p:nvPr>
+            <p:ph type="title"/>
+          </p:nvPr>
+        </p:nvSpPr>
+        <p:spPr>
+          <a:xfrm>
+            <a:off x="629841" y="342900"/>
+            <a:ext cx="2949178" cy="1200150"/>
+          </a:xfrm>
+        </p:spPr>
+        <p:txBody>
+          <a:bodyPr anchor="b"/>
+          <a:lstStyle>
+            <a:lvl1pPr>
+              <a:defRPr sz="2400"/>
+            </a:lvl1pPr>
+          </a:lstStyle>
+          <a:p>
+            <a:r>
+              <a:rPr lang="en-US"/>
+              <a:t>Click to edit Master title style</a:t>
+            </a:r>
+            <a:endParaRPr lang="en-US" dirty="0"/>
+          </a:p>
+        </p:txBody>
+      </p:sp>
+      <p:sp>
+        <p:nvSpPr>
+          <p:cNvPr id="3" name="Content Placeholder 2"/>
+          <p:cNvSpPr>
+            <a:spLocks noGrp="1"/>
+          </p:cNvSpPr>
+          <p:nvPr>
+            <p:ph idx="1"/>
+          </p:nvPr>
+        </p:nvSpPr>
+        <p:spPr>
+          <a:xfrm>
+            <a:off x="3887391" y="740569"/>
+            <a:ext cx="4629150" cy="3655219"/>
+          </a:xfrm>
+        </p:spPr>
+        <p:txBody>
+          <a:bodyPr/>
+          <a:lstStyle>
+            <a:lvl1pPr>
+              <a:defRPr sz="2400"/>
+            </a:lvl1pPr>
+            <a:lvl2pPr>
+              <a:defRPr sz="2100"/>
+            </a:lvl2pPr>
+            <a:lvl3pPr>
+              <a:defRPr sz="1800"/>
+            </a:lvl3pPr>
+            <a:lvl4pPr>
+              <a:defRPr sz="1500"/>
+            </a:lvl4pPr>
+            <a:lvl5pPr>
+              <a:defRPr sz="1500"/>
+            </a:lvl5pPr>
+            <a:lvl6pPr>
+              <a:defRPr sz="1500"/>
+            </a:lvl6pPr>
+            <a:lvl7pPr>
+              <a:defRPr sz="1500"/>
+            </a:lvl7pPr>
+            <a:lvl8pPr>
+              <a:defRPr sz="1500"/>
+            </a:lvl8pPr>
+            <a:lvl9pPr>
+              <a:defRPr sz="1500"/>
+            </a:lvl9pPr>
+          </a:lstStyle>
+          <a:p>
+            <a:pPr lvl="0"/>
+            <a:r>
+              <a:rPr lang="en-US"/>
+              <a:t>Click to edit Master text styles</a:t>
+            </a:r>
+          </a:p>
+          <a:p>
+            <a:pPr lvl="1"/>
+            <a:r>
+              <a:rPr lang="en-US"/>
+              <a:t>Second level</a:t>
+            </a:r>
+          </a:p>
+          <a:p>
+            <a:pPr lvl="2"/>
+            <a:r>
+              <a:rPr lang="en-US"/>
+              <a:t>Third level</a:t>
+            </a:r>
+          </a:p>
+          <a:p>
+            <a:pPr lvl="3"/>
+            <a:r>
+              <a:rPr lang="en-US"/>
+              <a:t>Fourth level</a:t>
+            </a:r>
+          </a:p>
+          <a:p>
+            <a:pPr lvl="4"/>
+            <a:r>
+              <a:rPr lang="en-US"/>
+              <a:t>Fifth level</a:t>
+            </a:r>
+            <a:endParaRPr lang="en-US" dirty="0"/>
+          </a:p>
+        </p:txBody>
+      </p:sp>
+      <p:sp>
+        <p:nvSpPr>
+          <p:cNvPr id="4" name="Text Placeholder 3"/>
+          <p:cNvSpPr>
+            <a:spLocks noGrp="1"/>
+          </p:cNvSpPr>
+          <p:nvPr>
+            <p:ph type="body" sz="half" idx="2"/>
+          </p:nvPr>
+        </p:nvSpPr>
+        <p:spPr>
+          <a:xfrm>
+            <a:off x="629841" y="1543050"/>
+            <a:ext cx="2949178" cy="2858691"/>
+          </a:xfrm>
+        </p:spPr>
+        <p:txBody>
+          <a:bodyPr/>
+          <a:lstStyle>
+            <a:lvl1pPr marL="0" indent="0">
+              <a:buNone/>
+              <a:defRPr sz="1200"/>
+            </a:lvl1pPr>
+            <a:lvl2pPr marL="342900" indent="0">
+              <a:buNone/>
+              <a:defRPr sz="1050"/>
+            </a:lvl2pPr>
+            <a:lvl3pPr marL="685800" indent="0">
+              <a:buNone/>
+              <a:defRPr sz="900"/>
+            </a:lvl3pPr>
+            <a:lvl4pPr marL="1028700" indent="0">
+              <a:buNone/>
+              <a:defRPr sz="750"/>
+            </a:lvl4pPr>
+            <a:lvl5pPr marL="1371600" indent="0">
+              <a:buNone/>
+              <a:defRPr sz="750"/>
+            </a:lvl5pPr>
+            <a:lvl6pPr marL="1714500" indent="0">
+              <a:buNone/>
+              <a:defRPr sz="750"/>
+            </a:lvl6pPr>
+            <a:lvl7pPr marL="2057400" indent="0">
+              <a:buNone/>
+              <a:defRPr sz="750"/>
+            </a:lvl7pPr>
+            <a:lvl8pPr marL="2400300" indent="0">
+              <a:buNone/>
+              <a:defRPr sz="750"/>
+            </a:lvl8pPr>
+            <a:lvl9pPr marL="2743200" indent="0">
+              <a:buNone/>
+              <a:defRPr sz="750"/>
+            </a:lvl9pPr>
+          </a:lstStyle>
+          <a:p>
+            <a:pPr lvl="0"/>
+            <a:r>
+              <a:rPr lang="en-US"/>
+              <a:t>Click to edit Master text styles</a:t>
+            </a:r>
+          </a:p>
+        </p:txBody>
+      </p:sp>
+      <p:sp>
+        <p:nvSpPr>
+          <p:cNvPr id="5" name="Date Placeholder 4"/>
+          <p:cNvSpPr>
+            <a:spLocks noGrp="1"/>
+          </p:cNvSpPr>
+          <p:nvPr>
+            <p:ph type="dt" sz="half" idx="10"/>
+          </p:nvPr>
+        </p:nvSpPr>
+        <p:spPr/>
+        <p:txBody>
+          <a:bodyPr/>
+          <a:lstStyle/>
+          <a:p>
+            <a:fld id="{C764DE79-268F-4C1A-8933-263129D2AF90}" type="datetimeFigureOut">
+              <a:rPr lang="en-US" smtClean="0"/>
+              <a:t>5/7/2026</a:t>
+            </a:fld>
+            <a:endParaRPr lang="en-US" dirty="0"/>
+          </a:p>
+        </p:txBody>
+      </p:sp>
+      <p:sp>
+        <p:nvSpPr>
+          <p:cNvPr id="6" name="Footer Placeholder 5"/>
+          <p:cNvSpPr>
+            <a:spLocks noGrp="1"/>
+          </p:cNvSpPr>
+          <p:nvPr>
+            <p:ph type="ftr" sz="quarter" idx="11"/>
+          </p:nvPr>
+        </p:nvSpPr>
+        <p:spPr/>
+        <p:txBody>
+          <a:bodyPr/>
+          <a:lstStyle/>
+          <a:p>
+            <a:endParaRPr lang="en-US" dirty="0"/>
+          </a:p>
+        </p:txBody>
+      </p:sp>
+      <p:sp>
+        <p:nvSpPr>
+          <p:cNvPr id="7" name="Slide Number Placeholder 6"/>
+          <p:cNvSpPr>
+            <a:spLocks noGrp="1"/>
+          </p:cNvSpPr>
+          <p:nvPr>
+            <p:ph type="sldNum" sz="quarter" idx="12"/>
+          </p:nvPr>
+        </p:nvSpPr>
+        <p:spPr/>
+        <p:txBody>
+          <a:bodyPr/>
+          <a:lstStyle/>
+          <a:p>
+            <a:fld id="{48F63A3B-78C7-47BE-AE5E-E10140E04643}" type="slidenum">
+              <a:rPr lang="en-US" smtClean="0"/>
+              <a:t>‹#›</a:t>
+            </a:fld>
+            <a:endParaRPr lang="en-US" dirty="0"/>
+          </a:p>
+        </p:txBody>
+      </p:sp>
+    </p:spTree>
+    <p:extLst>
+      <p:ext uri="{BB962C8B-B14F-4D97-AF65-F5344CB8AC3E}">
+        <p14:creationId xmlns:p14="http://schemas.microsoft.com/office/powerpoint/2010/main" val="4167608059"/>
+      </p:ext>
+    </p:extLst>
+  </p:cSld>
+  <p:clrMapOvr>
+    <a:masterClrMapping/>
+  </p:clrMapOvr>
+  <p:hf sldNum="0" hdr="0" ftr="0" dt="0"/>
+</p:sldLayout>
+</file>
+
+<file path=ppt/slideLayouts/slideLayout9.xml><?xml version="1.0" encoding="utf-8"?>
+<p:sldLayout xmlns:a="http://schemas.openxmlformats.org/drawingml/2006/main" xmlns:r="http://schemas.openxmlformats.org/officeDocument/2006/relationships" xmlns:p="http://schemas.openxmlformats.org/presentationml/2006/main" type="picTx" preserve="1">
+  <p:cSld name="Picture with Caption">
+    <p:spTree>
+      <p:nvGrpSpPr>
+        <p:cNvPr id="1" name=""/>
+        <p:cNvGrpSpPr/>
+        <p:nvPr/>
+      </p:nvGrpSpPr>
+      <p:grpSpPr>
+        <a:xfrm>
+          <a:off x="0" y="0"/>
+          <a:ext cx="0" cy="0"/>
+          <a:chOff x="0" y="0"/>
+          <a:chExt cx="0" cy="0"/>
+        </a:xfrm>
+      </p:grpSpPr>
+      <p:sp>
+        <p:nvSpPr>
+          <p:cNvPr id="2" name="Title 1"/>
+          <p:cNvSpPr>
+            <a:spLocks noGrp="1"/>
+          </p:cNvSpPr>
+          <p:nvPr>
+            <p:ph type="title"/>
+          </p:nvPr>
+        </p:nvSpPr>
+        <p:spPr>
+          <a:xfrm>
+            <a:off x="629841" y="342900"/>
+            <a:ext cx="2949178" cy="1200150"/>
+          </a:xfrm>
+        </p:spPr>
+        <p:txBody>
+          <a:bodyPr anchor="b"/>
+          <a:lstStyle>
+            <a:lvl1pPr>
+              <a:defRPr sz="2400"/>
+            </a:lvl1pPr>
+          </a:lstStyle>
+          <a:p>
+            <a:r>
+              <a:rPr lang="en-US"/>
+              <a:t>Click to edit Master title style</a:t>
+            </a:r>
+            <a:endParaRPr lang="en-US" dirty="0"/>
+          </a:p>
+        </p:txBody>
+      </p:sp>
+      <p:sp>
+        <p:nvSpPr>
+          <p:cNvPr id="3" name="Picture Placeholder 2"/>
+          <p:cNvSpPr>
+            <a:spLocks noGrp="1" noChangeAspect="1"/>
+          </p:cNvSpPr>
+          <p:nvPr>
+            <p:ph type="pic" idx="1"/>
+          </p:nvPr>
+        </p:nvSpPr>
+        <p:spPr>
+          <a:xfrm>
+            <a:off x="3887391" y="740569"/>
+            <a:ext cx="4629150" cy="3655219"/>
+          </a:xfrm>
+        </p:spPr>
+        <p:txBody>
+          <a:bodyPr anchor="t"/>
+          <a:lstStyle>
+            <a:lvl1pPr marL="0" indent="0">
+              <a:buNone/>
+              <a:defRPr sz="2400"/>
+            </a:lvl1pPr>
+            <a:lvl2pPr marL="342900" indent="0">
+              <a:buNone/>
+              <a:defRPr sz="2100"/>
+            </a:lvl2pPr>
+            <a:lvl3pPr marL="685800" indent="0">
+              <a:buNone/>
+              <a:defRPr sz="1800"/>
+            </a:lvl3pPr>
+            <a:lvl4pPr marL="1028700" indent="0">
+              <a:buNone/>
+              <a:defRPr sz="1500"/>
+            </a:lvl4pPr>
+            <a:lvl5pPr marL="1371600" indent="0">
+              <a:buNone/>
+              <a:defRPr sz="1500"/>
+            </a:lvl5pPr>
+            <a:lvl6pPr marL="1714500" indent="0">
+              <a:buNone/>
+              <a:defRPr sz="1500"/>
+            </a:lvl6pPr>
+            <a:lvl7pPr marL="2057400" indent="0">
+              <a:buNone/>
+              <a:defRPr sz="1500"/>
+            </a:lvl7pPr>
+            <a:lvl8pPr marL="2400300" indent="0">
+              <a:buNone/>
+              <a:defRPr sz="1500"/>
+            </a:lvl8pPr>
+            <a:lvl9pPr marL="2743200" indent="0">
+              <a:buNone/>
+              <a:defRPr sz="1500"/>
+            </a:lvl9pPr>
+          </a:lstStyle>
+          <a:p>
+            <a:r>
+              <a:rPr lang="en-US"/>
+              <a:t>Click icon to add picture</a:t>
+            </a:r>
+            <a:endParaRPr lang="en-US" dirty="0"/>
+          </a:p>
+        </p:txBody>
+      </p:sp>
+      <p:sp>
+        <p:nvSpPr>
+          <p:cNvPr id="4" name="Text Placeholder 3"/>
+          <p:cNvSpPr>
+            <a:spLocks noGrp="1"/>
+          </p:cNvSpPr>
+          <p:nvPr>
+            <p:ph type="body" sz="half" idx="2"/>
+          </p:nvPr>
+        </p:nvSpPr>
+        <p:spPr>
+          <a:xfrm>
+            <a:off x="629841" y="1543050"/>
+            <a:ext cx="2949178" cy="2858691"/>
+          </a:xfrm>
+        </p:spPr>
+        <p:txBody>
+          <a:bodyPr/>
+          <a:lstStyle>
+            <a:lvl1pPr marL="0" indent="0">
+              <a:buNone/>
+              <a:defRPr sz="1200"/>
+            </a:lvl1pPr>
+            <a:lvl2pPr marL="342900" indent="0">
+              <a:buNone/>
+              <a:defRPr sz="1050"/>
+            </a:lvl2pPr>
+            <a:lvl3pPr marL="685800" indent="0">
+              <a:buNone/>
+              <a:defRPr sz="900"/>
+            </a:lvl3pPr>
+            <a:lvl4pPr marL="1028700" indent="0">
+              <a:buNone/>
+              <a:defRPr sz="750"/>
+            </a:lvl4pPr>
+            <a:lvl5pPr marL="1371600" indent="0">
+              <a:buNone/>
+              <a:defRPr sz="750"/>
+            </a:lvl5pPr>
+            <a:lvl6pPr marL="1714500" indent="0">
+              <a:buNone/>
+              <a:defRPr sz="750"/>
+            </a:lvl6pPr>
+            <a:lvl7pPr marL="2057400" indent="0">
+              <a:buNone/>
+              <a:defRPr sz="750"/>
+            </a:lvl7pPr>
+            <a:lvl8pPr marL="2400300" indent="0">
+              <a:buNone/>
+              <a:defRPr sz="750"/>
+            </a:lvl8pPr>
+            <a:lvl9pPr marL="2743200" indent="0">
+              <a:buNone/>
+              <a:defRPr sz="750"/>
+            </a:lvl9pPr>
+          </a:lstStyle>
+          <a:p>
+            <a:pPr lvl="0"/>
+            <a:r>
+              <a:rPr lang="en-US"/>
+              <a:t>Click to edit Master text styles</a:t>
+            </a:r>
+          </a:p>
+        </p:txBody>
+      </p:sp>
+      <p:sp>
+        <p:nvSpPr>
+          <p:cNvPr id="5" name="Date Placeholder 4"/>
+          <p:cNvSpPr>
+            <a:spLocks noGrp="1"/>
+          </p:cNvSpPr>
+          <p:nvPr>
+            <p:ph type="dt" sz="half" idx="10"/>
+          </p:nvPr>
+        </p:nvSpPr>
+        <p:spPr/>
+        <p:txBody>
+          <a:bodyPr/>
+          <a:lstStyle/>
+          <a:p>
+            <a:fld id="{C764DE79-268F-4C1A-8933-263129D2AF90}" type="datetimeFigureOut">
+              <a:rPr lang="en-US" smtClean="0"/>
+              <a:t>5/7/2026</a:t>
+            </a:fld>
+            <a:endParaRPr lang="en-US" dirty="0"/>
+          </a:p>
+        </p:txBody>
+      </p:sp>
+      <p:sp>
+        <p:nvSpPr>
+          <p:cNvPr id="6" name="Footer Placeholder 5"/>
+          <p:cNvSpPr>
+            <a:spLocks noGrp="1"/>
+          </p:cNvSpPr>
+          <p:nvPr>
+            <p:ph type="ftr" sz="quarter" idx="11"/>
+          </p:nvPr>
+        </p:nvSpPr>
+        <p:spPr/>
+        <p:txBody>
+          <a:bodyPr/>
+          <a:lstStyle/>
+          <a:p>
+            <a:endParaRPr lang="en-US" dirty="0"/>
+          </a:p>
+        </p:txBody>
+      </p:sp>
+      <p:sp>
+        <p:nvSpPr>
+          <p:cNvPr id="7" name="Slide Number Placeholder 6"/>
+          <p:cNvSpPr>
+            <a:spLocks noGrp="1"/>
+          </p:cNvSpPr>
+          <p:nvPr>
+            <p:ph type="sldNum" sz="quarter" idx="12"/>
+          </p:nvPr>
+        </p:nvSpPr>
+        <p:spPr/>
+        <p:txBody>
+          <a:bodyPr/>
+          <a:lstStyle/>
+          <a:p>
+            <a:fld id="{48F63A3B-78C7-47BE-AE5E-E10140E04643}" type="slidenum">
+              <a:rPr lang="en-US" smtClean="0"/>
+              <a:t>‹#›</a:t>
+            </a:fld>
+            <a:endParaRPr lang="en-US" dirty="0"/>
+          </a:p>
+        </p:txBody>
+      </p:sp>
+    </p:spTree>
+    <p:extLst>
+      <p:ext uri="{BB962C8B-B14F-4D97-AF65-F5344CB8AC3E}">
+        <p14:creationId xmlns:p14="http://schemas.microsoft.com/office/powerpoint/2010/main" val="571014586"/>
+      </p:ext>
+    </p:extLst>
+  </p:cSld>
+  <p:clrMapOvr>
+    <a:masterClrMapping/>
+  </p:clrMapOvr>
+  <p:hf sldNum="0" hdr="0" ftr="0" dt="0"/>
 </p:sldLayout>
 </file>
 
@@ -1393,21 +3716,254 @@
           <a:chExt cx="0" cy="0"/>
         </a:xfrm>
       </p:grpSpPr>
+      <p:sp>
+        <p:nvSpPr>
+          <p:cNvPr id="2" name="Title Placeholder 1"/>
+          <p:cNvSpPr>
+            <a:spLocks noGrp="1"/>
+          </p:cNvSpPr>
+          <p:nvPr>
+            <p:ph type="title"/>
+          </p:nvPr>
+        </p:nvSpPr>
+        <p:spPr>
+          <a:xfrm>
+            <a:off x="628650" y="273844"/>
+            <a:ext cx="7886700" cy="994172"/>
+          </a:xfrm>
+          <a:prstGeom prst="rect">
+            <a:avLst/>
+          </a:prstGeom>
+        </p:spPr>
+        <p:txBody>
+          <a:bodyPr vert="horz" lIns="91440" tIns="45720" rIns="91440" bIns="45720" rtlCol="0" anchor="ctr">
+            <a:normAutofit/>
+          </a:bodyPr>
+          <a:lstStyle/>
+          <a:p>
+            <a:r>
+              <a:rPr lang="en-US"/>
+              <a:t>Click to edit Master title style</a:t>
+            </a:r>
+            <a:endParaRPr lang="en-US" dirty="0"/>
+          </a:p>
+        </p:txBody>
+      </p:sp>
+      <p:sp>
+        <p:nvSpPr>
+          <p:cNvPr id="3" name="Text Placeholder 2"/>
+          <p:cNvSpPr>
+            <a:spLocks noGrp="1"/>
+          </p:cNvSpPr>
+          <p:nvPr>
+            <p:ph type="body" idx="1"/>
+          </p:nvPr>
+        </p:nvSpPr>
+        <p:spPr>
+          <a:xfrm>
+            <a:off x="628650" y="1369219"/>
+            <a:ext cx="7886700" cy="3263504"/>
+          </a:xfrm>
+          <a:prstGeom prst="rect">
+            <a:avLst/>
+          </a:prstGeom>
+        </p:spPr>
+        <p:txBody>
+          <a:bodyPr vert="horz" lIns="91440" tIns="45720" rIns="91440" bIns="45720" rtlCol="0">
+            <a:normAutofit/>
+          </a:bodyPr>
+          <a:lstStyle/>
+          <a:p>
+            <a:pPr lvl="0"/>
+            <a:r>
+              <a:rPr lang="en-US"/>
+              <a:t>Click to edit Master text styles</a:t>
+            </a:r>
+          </a:p>
+          <a:p>
+            <a:pPr lvl="1"/>
+            <a:r>
+              <a:rPr lang="en-US"/>
+              <a:t>Second level</a:t>
+            </a:r>
+          </a:p>
+          <a:p>
+            <a:pPr lvl="2"/>
+            <a:r>
+              <a:rPr lang="en-US"/>
+              <a:t>Third level</a:t>
+            </a:r>
+          </a:p>
+          <a:p>
+            <a:pPr lvl="3"/>
+            <a:r>
+              <a:rPr lang="en-US"/>
+              <a:t>Fourth level</a:t>
+            </a:r>
+          </a:p>
+          <a:p>
+            <a:pPr lvl="4"/>
+            <a:r>
+              <a:rPr lang="en-US"/>
+              <a:t>Fifth level</a:t>
+            </a:r>
+            <a:endParaRPr lang="en-US" dirty="0"/>
+          </a:p>
+        </p:txBody>
+      </p:sp>
+      <p:sp>
+        <p:nvSpPr>
+          <p:cNvPr id="4" name="Date Placeholder 3"/>
+          <p:cNvSpPr>
+            <a:spLocks noGrp="1"/>
+          </p:cNvSpPr>
+          <p:nvPr>
+            <p:ph type="dt" sz="half" idx="2"/>
+          </p:nvPr>
+        </p:nvSpPr>
+        <p:spPr>
+          <a:xfrm>
+            <a:off x="628650" y="4767263"/>
+            <a:ext cx="2057400" cy="273844"/>
+          </a:xfrm>
+          <a:prstGeom prst="rect">
+            <a:avLst/>
+          </a:prstGeom>
+        </p:spPr>
+        <p:txBody>
+          <a:bodyPr vert="horz" lIns="91440" tIns="45720" rIns="91440" bIns="45720" rtlCol="0" anchor="ctr"/>
+          <a:lstStyle>
+            <a:lvl1pPr algn="l">
+              <a:defRPr sz="900">
+                <a:solidFill>
+                  <a:schemeClr val="tx1">
+                    <a:tint val="75000"/>
+                  </a:schemeClr>
+                </a:solidFill>
+              </a:defRPr>
+            </a:lvl1pPr>
+          </a:lstStyle>
+          <a:p>
+            <a:fld id="{C764DE79-268F-4C1A-8933-263129D2AF90}" type="datetimeFigureOut">
+              <a:rPr lang="en-US" smtClean="0"/>
+              <a:t>5/7/2026</a:t>
+            </a:fld>
+            <a:endParaRPr lang="en-US" dirty="0"/>
+          </a:p>
+        </p:txBody>
+      </p:sp>
+      <p:sp>
+        <p:nvSpPr>
+          <p:cNvPr id="5" name="Footer Placeholder 4"/>
+          <p:cNvSpPr>
+            <a:spLocks noGrp="1"/>
+          </p:cNvSpPr>
+          <p:nvPr>
+            <p:ph type="ftr" sz="quarter" idx="3"/>
+          </p:nvPr>
+        </p:nvSpPr>
+        <p:spPr>
+          <a:xfrm>
+            <a:off x="3028950" y="4767263"/>
+            <a:ext cx="3086100" cy="273844"/>
+          </a:xfrm>
+          <a:prstGeom prst="rect">
+            <a:avLst/>
+          </a:prstGeom>
+        </p:spPr>
+        <p:txBody>
+          <a:bodyPr vert="horz" lIns="91440" tIns="45720" rIns="91440" bIns="45720" rtlCol="0" anchor="ctr"/>
+          <a:lstStyle>
+            <a:lvl1pPr algn="ctr">
+              <a:defRPr sz="900">
+                <a:solidFill>
+                  <a:schemeClr val="tx1">
+                    <a:tint val="75000"/>
+                  </a:schemeClr>
+                </a:solidFill>
+              </a:defRPr>
+            </a:lvl1pPr>
+          </a:lstStyle>
+          <a:p>
+            <a:endParaRPr lang="en-US" dirty="0"/>
+          </a:p>
+        </p:txBody>
+      </p:sp>
+      <p:sp>
+        <p:nvSpPr>
+          <p:cNvPr id="6" name="Slide Number Placeholder 5"/>
+          <p:cNvSpPr>
+            <a:spLocks noGrp="1"/>
+          </p:cNvSpPr>
+          <p:nvPr>
+            <p:ph type="sldNum" sz="quarter" idx="4"/>
+          </p:nvPr>
+        </p:nvSpPr>
+        <p:spPr>
+          <a:xfrm>
+            <a:off x="6457950" y="4767263"/>
+            <a:ext cx="2057400" cy="273844"/>
+          </a:xfrm>
+          <a:prstGeom prst="rect">
+            <a:avLst/>
+          </a:prstGeom>
+        </p:spPr>
+        <p:txBody>
+          <a:bodyPr vert="horz" lIns="91440" tIns="45720" rIns="91440" bIns="45720" rtlCol="0" anchor="ctr"/>
+          <a:lstStyle>
+            <a:lvl1pPr algn="r">
+              <a:defRPr sz="900">
+                <a:solidFill>
+                  <a:schemeClr val="tx1">
+                    <a:tint val="75000"/>
+                  </a:schemeClr>
+                </a:solidFill>
+              </a:defRPr>
+            </a:lvl1pPr>
+          </a:lstStyle>
+          <a:p>
+            <a:fld id="{48F63A3B-78C7-47BE-AE5E-E10140E04643}" type="slidenum">
+              <a:rPr lang="en-US" smtClean="0"/>
+              <a:t>‹#›</a:t>
+            </a:fld>
+            <a:endParaRPr lang="en-US" dirty="0"/>
+          </a:p>
+        </p:txBody>
+      </p:sp>
     </p:spTree>
+    <p:extLst>
+      <p:ext uri="{BB962C8B-B14F-4D97-AF65-F5344CB8AC3E}">
+        <p14:creationId xmlns:p14="http://schemas.microsoft.com/office/powerpoint/2010/main" val="2519585613"/>
+      </p:ext>
+    </p:extLst>
   </p:cSld>
   <p:clrMap bg1="lt1" tx1="dk1" bg2="lt2" tx2="dk2" accent1="accent1" accent2="accent2" accent3="accent3" accent4="accent4" accent5="accent5" accent6="accent6" hlink="hlink" folHlink="folHlink"/>
   <p:sldLayoutIdLst>
-    <p:sldLayoutId id="2147483649" r:id="rId1"/>
+    <p:sldLayoutId id="2147483664" r:id="rId1"/>
+    <p:sldLayoutId id="2147483665" r:id="rId2"/>
+    <p:sldLayoutId id="2147483666" r:id="rId3"/>
+    <p:sldLayoutId id="2147483667" r:id="rId4"/>
+    <p:sldLayoutId id="2147483668" r:id="rId5"/>
+    <p:sldLayoutId id="2147483669" r:id="rId6"/>
+    <p:sldLayoutId id="2147483670" r:id="rId7"/>
+    <p:sldLayoutId id="2147483671" r:id="rId8"/>
+    <p:sldLayoutId id="2147483672" r:id="rId9"/>
+    <p:sldLayoutId id="2147483673" r:id="rId10"/>
+    <p:sldLayoutId id="2147483674" r:id="rId11"/>
+    <p:sldLayoutId id="2147483675" r:id="rId12"/>
   </p:sldLayoutIdLst>
   <p:hf sldNum="0" hdr="0" ftr="0" dt="0"/>
   <p:txStyles>
     <p:titleStyle>
-      <a:lvl1pPr algn="ctr" defTabSz="914400" rtl="0" eaLnBrk="1" latinLnBrk="0" hangingPunct="1">
+      <a:lvl1pPr algn="l" defTabSz="685800" rtl="0" eaLnBrk="1" latinLnBrk="0" hangingPunct="1">
+        <a:lnSpc>
+          <a:spcPct val="90000"/>
+        </a:lnSpc>
         <a:spcBef>
           <a:spcPct val="0"/>
         </a:spcBef>
         <a:buNone/>
-        <a:defRPr sz="4400" kern="1200">
+        <a:defRPr sz="3300" kern="1200">
           <a:solidFill>
             <a:schemeClr val="tx1"/>
           </a:solidFill>
@@ -1418,13 +3974,16 @@
       </a:lvl1pPr>
     </p:titleStyle>
     <p:bodyStyle>
-      <a:lvl1pPr marL="342900" indent="-342900" algn="l" defTabSz="914400" rtl="0" eaLnBrk="1" latinLnBrk="0" hangingPunct="1">
+      <a:lvl1pPr marL="171450" indent="-171450" algn="l" defTabSz="685800" rtl="0" eaLnBrk="1" latinLnBrk="0" hangingPunct="1">
+        <a:lnSpc>
+          <a:spcPct val="90000"/>
+        </a:lnSpc>
         <a:spcBef>
-          <a:spcPct val="20000"/>
+          <a:spcPts val="750"/>
         </a:spcBef>
-        <a:buFont typeface="Arial" pitchFamily="34" charset="0"/>
+        <a:buFont typeface="Arial" panose="020B0604020202020204" pitchFamily="34" charset="0"/>
         <a:buChar char="•"/>
-        <a:defRPr sz="3200" kern="1200">
+        <a:defRPr sz="2100" kern="1200">
           <a:solidFill>
             <a:schemeClr val="tx1"/>
           </a:solidFill>
@@ -1433,13 +3992,16 @@
           <a:cs typeface="+mn-cs"/>
         </a:defRPr>
       </a:lvl1pPr>
-      <a:lvl2pPr marL="742950" indent="-285750" algn="l" defTabSz="914400" rtl="0" eaLnBrk="1" latinLnBrk="0" hangingPunct="1">
+      <a:lvl2pPr marL="514350" indent="-171450" algn="l" defTabSz="685800" rtl="0" eaLnBrk="1" latinLnBrk="0" hangingPunct="1">
+        <a:lnSpc>
+          <a:spcPct val="90000"/>
+        </a:lnSpc>
         <a:spcBef>
-          <a:spcPct val="20000"/>
+          <a:spcPts val="375"/>
         </a:spcBef>
-        <a:buFont typeface="Arial" pitchFamily="34" charset="0"/>
-        <a:buChar char="–"/>
-        <a:defRPr sz="2800" kern="1200">
+        <a:buFont typeface="Arial" panose="020B0604020202020204" pitchFamily="34" charset="0"/>
+        <a:buChar char="•"/>
+        <a:defRPr sz="1800" kern="1200">
           <a:solidFill>
             <a:schemeClr val="tx1"/>
           </a:solidFill>
@@ -1448,13 +4010,16 @@
           <a:cs typeface="+mn-cs"/>
         </a:defRPr>
       </a:lvl2pPr>
-      <a:lvl3pPr marL="1143000" indent="-228600" algn="l" defTabSz="914400" rtl="0" eaLnBrk="1" latinLnBrk="0" hangingPunct="1">
+      <a:lvl3pPr marL="857250" indent="-171450" algn="l" defTabSz="685800" rtl="0" eaLnBrk="1" latinLnBrk="0" hangingPunct="1">
+        <a:lnSpc>
+          <a:spcPct val="90000"/>
+        </a:lnSpc>
         <a:spcBef>
-          <a:spcPct val="20000"/>
+          <a:spcPts val="375"/>
         </a:spcBef>
-        <a:buFont typeface="Arial" pitchFamily="34" charset="0"/>
+        <a:buFont typeface="Arial" panose="020B0604020202020204" pitchFamily="34" charset="0"/>
         <a:buChar char="•"/>
-        <a:defRPr sz="2400" kern="1200">
+        <a:defRPr sz="1500" kern="1200">
           <a:solidFill>
             <a:schemeClr val="tx1"/>
           </a:solidFill>
@@ -1463,13 +4028,16 @@
           <a:cs typeface="+mn-cs"/>
         </a:defRPr>
       </a:lvl3pPr>
-      <a:lvl4pPr marL="1600200" indent="-228600" algn="l" defTabSz="914400" rtl="0" eaLnBrk="1" latinLnBrk="0" hangingPunct="1">
+      <a:lvl4pPr marL="1200150" indent="-171450" algn="l" defTabSz="685800" rtl="0" eaLnBrk="1" latinLnBrk="0" hangingPunct="1">
+        <a:lnSpc>
+          <a:spcPct val="90000"/>
+        </a:lnSpc>
         <a:spcBef>
-          <a:spcPct val="20000"/>
+          <a:spcPts val="375"/>
         </a:spcBef>
-        <a:buFont typeface="Arial" pitchFamily="34" charset="0"/>
-        <a:buChar char="–"/>
-        <a:defRPr sz="2000" kern="1200">
+        <a:buFont typeface="Arial" panose="020B0604020202020204" pitchFamily="34" charset="0"/>
+        <a:buChar char="•"/>
+        <a:defRPr sz="1350" kern="1200">
           <a:solidFill>
             <a:schemeClr val="tx1"/>
           </a:solidFill>
@@ -1478,13 +4046,16 @@
           <a:cs typeface="+mn-cs"/>
         </a:defRPr>
       </a:lvl4pPr>
-      <a:lvl5pPr marL="2057400" indent="-228600" algn="l" defTabSz="914400" rtl="0" eaLnBrk="1" latinLnBrk="0" hangingPunct="1">
+      <a:lvl5pPr marL="1543050" indent="-171450" algn="l" defTabSz="685800" rtl="0" eaLnBrk="1" latinLnBrk="0" hangingPunct="1">
+        <a:lnSpc>
+          <a:spcPct val="90000"/>
+        </a:lnSpc>
         <a:spcBef>
-          <a:spcPct val="20000"/>
+          <a:spcPts val="375"/>
         </a:spcBef>
-        <a:buFont typeface="Arial" pitchFamily="34" charset="0"/>
-        <a:buChar char="»"/>
-        <a:defRPr sz="2000" kern="1200">
+        <a:buFont typeface="Arial" panose="020B0604020202020204" pitchFamily="34" charset="0"/>
+        <a:buChar char="•"/>
+        <a:defRPr sz="1350" kern="1200">
           <a:solidFill>
             <a:schemeClr val="tx1"/>
           </a:solidFill>
@@ -1493,13 +4064,16 @@
           <a:cs typeface="+mn-cs"/>
         </a:defRPr>
       </a:lvl5pPr>
-      <a:lvl6pPr marL="2514600" indent="-228600" algn="l" defTabSz="914400" rtl="0" eaLnBrk="1" latinLnBrk="0" hangingPunct="1">
+      <a:lvl6pPr marL="1885950" indent="-171450" algn="l" defTabSz="685800" rtl="0" eaLnBrk="1" latinLnBrk="0" hangingPunct="1">
+        <a:lnSpc>
+          <a:spcPct val="90000"/>
+        </a:lnSpc>
         <a:spcBef>
-          <a:spcPct val="20000"/>
+          <a:spcPts val="375"/>
         </a:spcBef>
-        <a:buFont typeface="Arial" pitchFamily="34" charset="0"/>
+        <a:buFont typeface="Arial" panose="020B0604020202020204" pitchFamily="34" charset="0"/>
         <a:buChar char="•"/>
-        <a:defRPr sz="2000" kern="1200">
+        <a:defRPr sz="1350" kern="1200">
           <a:solidFill>
             <a:schemeClr val="tx1"/>
           </a:solidFill>
@@ -1508,13 +4082,16 @@
           <a:cs typeface="+mn-cs"/>
         </a:defRPr>
       </a:lvl6pPr>
-      <a:lvl7pPr marL="2971800" indent="-228600" algn="l" defTabSz="914400" rtl="0" eaLnBrk="1" latinLnBrk="0" hangingPunct="1">
+      <a:lvl7pPr marL="2228850" indent="-171450" algn="l" defTabSz="685800" rtl="0" eaLnBrk="1" latinLnBrk="0" hangingPunct="1">
+        <a:lnSpc>
+          <a:spcPct val="90000"/>
+        </a:lnSpc>
         <a:spcBef>
-          <a:spcPct val="20000"/>
+          <a:spcPts val="375"/>
         </a:spcBef>
-        <a:buFont typeface="Arial" pitchFamily="34" charset="0"/>
+        <a:buFont typeface="Arial" panose="020B0604020202020204" pitchFamily="34" charset="0"/>
         <a:buChar char="•"/>
-        <a:defRPr sz="2000" kern="1200">
+        <a:defRPr sz="1350" kern="1200">
           <a:solidFill>
             <a:schemeClr val="tx1"/>
           </a:solidFill>
@@ -1523,13 +4100,16 @@
           <a:cs typeface="+mn-cs"/>
         </a:defRPr>
       </a:lvl7pPr>
-      <a:lvl8pPr marL="3429000" indent="-228600" algn="l" defTabSz="914400" rtl="0" eaLnBrk="1" latinLnBrk="0" hangingPunct="1">
+      <a:lvl8pPr marL="2571750" indent="-171450" algn="l" defTabSz="685800" rtl="0" eaLnBrk="1" latinLnBrk="0" hangingPunct="1">
+        <a:lnSpc>
+          <a:spcPct val="90000"/>
+        </a:lnSpc>
         <a:spcBef>
-          <a:spcPct val="20000"/>
+          <a:spcPts val="375"/>
         </a:spcBef>
-        <a:buFont typeface="Arial" pitchFamily="34" charset="0"/>
+        <a:buFont typeface="Arial" panose="020B0604020202020204" pitchFamily="34" charset="0"/>
         <a:buChar char="•"/>
-        <a:defRPr sz="2000" kern="1200">
+        <a:defRPr sz="1350" kern="1200">
           <a:solidFill>
             <a:schemeClr val="tx1"/>
           </a:solidFill>
@@ -1538,13 +4118,16 @@
           <a:cs typeface="+mn-cs"/>
         </a:defRPr>
       </a:lvl8pPr>
-      <a:lvl9pPr marL="3886200" indent="-228600" algn="l" defTabSz="914400" rtl="0" eaLnBrk="1" latinLnBrk="0" hangingPunct="1">
+      <a:lvl9pPr marL="2914650" indent="-171450" algn="l" defTabSz="685800" rtl="0" eaLnBrk="1" latinLnBrk="0" hangingPunct="1">
+        <a:lnSpc>
+          <a:spcPct val="90000"/>
+        </a:lnSpc>
         <a:spcBef>
-          <a:spcPct val="20000"/>
+          <a:spcPts val="375"/>
         </a:spcBef>
-        <a:buFont typeface="Arial" pitchFamily="34" charset="0"/>
+        <a:buFont typeface="Arial" panose="020B0604020202020204" pitchFamily="34" charset="0"/>
         <a:buChar char="•"/>
-        <a:defRPr sz="2000" kern="1200">
+        <a:defRPr sz="1350" kern="1200">
           <a:solidFill>
             <a:schemeClr val="tx1"/>
           </a:solidFill>
@@ -1558,8 +4141,8 @@
       <a:defPPr>
         <a:defRPr lang="en-US"/>
       </a:defPPr>
-      <a:lvl1pPr marL="0" algn="l" defTabSz="914400" rtl="0" eaLnBrk="1" latinLnBrk="0" hangingPunct="1">
-        <a:defRPr sz="1800" kern="1200">
+      <a:lvl1pPr marL="0" algn="l" defTabSz="685800" rtl="0" eaLnBrk="1" latinLnBrk="0" hangingPunct="1">
+        <a:defRPr sz="1350" kern="1200">
           <a:solidFill>
             <a:schemeClr val="tx1"/>
           </a:solidFill>
@@ -1568,8 +4151,8 @@
           <a:cs typeface="+mn-cs"/>
         </a:defRPr>
       </a:lvl1pPr>
-      <a:lvl2pPr marL="457200" algn="l" defTabSz="914400" rtl="0" eaLnBrk="1" latinLnBrk="0" hangingPunct="1">
-        <a:defRPr sz="1800" kern="1200">
+      <a:lvl2pPr marL="342900" algn="l" defTabSz="685800" rtl="0" eaLnBrk="1" latinLnBrk="0" hangingPunct="1">
+        <a:defRPr sz="1350" kern="1200">
           <a:solidFill>
             <a:schemeClr val="tx1"/>
           </a:solidFill>
@@ -1578,8 +4161,8 @@
           <a:cs typeface="+mn-cs"/>
         </a:defRPr>
       </a:lvl2pPr>
-      <a:lvl3pPr marL="914400" algn="l" defTabSz="914400" rtl="0" eaLnBrk="1" latinLnBrk="0" hangingPunct="1">
-        <a:defRPr sz="1800" kern="1200">
+      <a:lvl3pPr marL="685800" algn="l" defTabSz="685800" rtl="0" eaLnBrk="1" latinLnBrk="0" hangingPunct="1">
+        <a:defRPr sz="1350" kern="1200">
           <a:solidFill>
             <a:schemeClr val="tx1"/>
           </a:solidFill>
@@ -1588,8 +4171,8 @@
           <a:cs typeface="+mn-cs"/>
         </a:defRPr>
       </a:lvl3pPr>
-      <a:lvl4pPr marL="1371600" algn="l" defTabSz="914400" rtl="0" eaLnBrk="1" latinLnBrk="0" hangingPunct="1">
-        <a:defRPr sz="1800" kern="1200">
+      <a:lvl4pPr marL="1028700" algn="l" defTabSz="685800" rtl="0" eaLnBrk="1" latinLnBrk="0" hangingPunct="1">
+        <a:defRPr sz="1350" kern="1200">
           <a:solidFill>
             <a:schemeClr val="tx1"/>
           </a:solidFill>
@@ -1598,8 +4181,8 @@
           <a:cs typeface="+mn-cs"/>
         </a:defRPr>
       </a:lvl4pPr>
-      <a:lvl5pPr marL="1828800" algn="l" defTabSz="914400" rtl="0" eaLnBrk="1" latinLnBrk="0" hangingPunct="1">
-        <a:defRPr sz="1800" kern="1200">
+      <a:lvl5pPr marL="1371600" algn="l" defTabSz="685800" rtl="0" eaLnBrk="1" latinLnBrk="0" hangingPunct="1">
+        <a:defRPr sz="1350" kern="1200">
           <a:solidFill>
             <a:schemeClr val="tx1"/>
           </a:solidFill>
@@ -1608,8 +4191,8 @@
           <a:cs typeface="+mn-cs"/>
         </a:defRPr>
       </a:lvl5pPr>
-      <a:lvl6pPr marL="2286000" algn="l" defTabSz="914400" rtl="0" eaLnBrk="1" latinLnBrk="0" hangingPunct="1">
-        <a:defRPr sz="1800" kern="1200">
+      <a:lvl6pPr marL="1714500" algn="l" defTabSz="685800" rtl="0" eaLnBrk="1" latinLnBrk="0" hangingPunct="1">
+        <a:defRPr sz="1350" kern="1200">
           <a:solidFill>
             <a:schemeClr val="tx1"/>
           </a:solidFill>
@@ -1618,8 +4201,8 @@
           <a:cs typeface="+mn-cs"/>
         </a:defRPr>
       </a:lvl6pPr>
-      <a:lvl7pPr marL="2743200" algn="l" defTabSz="914400" rtl="0" eaLnBrk="1" latinLnBrk="0" hangingPunct="1">
-        <a:defRPr sz="1800" kern="1200">
+      <a:lvl7pPr marL="2057400" algn="l" defTabSz="685800" rtl="0" eaLnBrk="1" latinLnBrk="0" hangingPunct="1">
+        <a:defRPr sz="1350" kern="1200">
           <a:solidFill>
             <a:schemeClr val="tx1"/>
           </a:solidFill>
@@ -1628,8 +4211,8 @@
           <a:cs typeface="+mn-cs"/>
         </a:defRPr>
       </a:lvl7pPr>
-      <a:lvl8pPr marL="3200400" algn="l" defTabSz="914400" rtl="0" eaLnBrk="1" latinLnBrk="0" hangingPunct="1">
-        <a:defRPr sz="1800" kern="1200">
+      <a:lvl8pPr marL="2400300" algn="l" defTabSz="685800" rtl="0" eaLnBrk="1" latinLnBrk="0" hangingPunct="1">
+        <a:defRPr sz="1350" kern="1200">
           <a:solidFill>
             <a:schemeClr val="tx1"/>
           </a:solidFill>
@@ -1638,8 +4221,8 @@
           <a:cs typeface="+mn-cs"/>
         </a:defRPr>
       </a:lvl8pPr>
-      <a:lvl9pPr marL="3657600" algn="l" defTabSz="914400" rtl="0" eaLnBrk="1" latinLnBrk="0" hangingPunct="1">
-        <a:defRPr sz="1800" kern="1200">
+      <a:lvl9pPr marL="2743200" algn="l" defTabSz="685800" rtl="0" eaLnBrk="1" latinLnBrk="0" hangingPunct="1">
+        <a:defRPr sz="1350" kern="1200">
           <a:solidFill>
             <a:schemeClr val="tx1"/>
           </a:solidFill>
@@ -6835,29 +9418,7 @@
                 <a:ea typeface="Trebuchet MS" pitchFamily="34" charset="-122"/>
                 <a:cs typeface="Trebuchet MS" pitchFamily="34" charset="-120"/>
               </a:rPr>
-              <a:t>А</a:t>
-            </a:r>
-            <a:r>
-              <a:rPr lang="en-US" sz="1400" b="1" dirty="0" err="1">
-                <a:solidFill>
-                  <a:srgbClr val="0B1D3A"/>
-                </a:solidFill>
-                <a:latin typeface="Trebuchet MS" pitchFamily="34" charset="0"/>
-                <a:ea typeface="Trebuchet MS" pitchFamily="34" charset="-122"/>
-                <a:cs typeface="Trebuchet MS" pitchFamily="34" charset="-120"/>
-              </a:rPr>
-              <a:t>лгоритми</a:t>
-            </a:r>
-            <a:r>
-              <a:rPr lang="uk-UA" sz="1400" b="1" dirty="0">
-                <a:solidFill>
-                  <a:srgbClr val="0B1D3A"/>
-                </a:solidFill>
-                <a:latin typeface="Trebuchet MS" pitchFamily="34" charset="0"/>
-                <a:ea typeface="Trebuchet MS" pitchFamily="34" charset="-122"/>
-                <a:cs typeface="Trebuchet MS" pitchFamily="34" charset="-120"/>
-              </a:rPr>
-              <a:t> оптимізації</a:t>
+              <a:t>Алгоритми оптимізації</a:t>
             </a:r>
             <a:endParaRPr lang="en-US" sz="1400" dirty="0"/>
           </a:p>
@@ -9180,7 +11741,7 @@
     <p:bg>
       <p:bgPr>
         <a:solidFill>
-          <a:srgbClr val="0A0A0A"/>
+          <a:schemeClr val="bg1"/>
         </a:solidFill>
         <a:effectLst/>
       </p:bgPr>
@@ -9225,9 +11786,6 @@
             </a:pPr>
             <a:r>
               <a:rPr lang="en-US" sz="2200" b="1" dirty="0">
-                <a:solidFill>
-                  <a:srgbClr val="FFFFFF"/>
-                </a:solidFill>
                 <a:latin typeface="Trebuchet MS" pitchFamily="34" charset="0"/>
                 <a:ea typeface="Trebuchet MS" pitchFamily="34" charset="-122"/>
                 <a:cs typeface="Trebuchet MS" pitchFamily="34" charset="-120"/>
@@ -9240,10 +11798,10 @@
       </p:sp>
       <p:pic>
         <p:nvPicPr>
-          <p:cNvPr id="5" name="Picture 4" descr="A computer screen with blue text&#10;&#10;AI-generated content may be incorrect.">
+          <p:cNvPr id="7" name="Picture 6" descr="A screenshot of a computer">
             <a:extLst>
               <a:ext uri="{FF2B5EF4-FFF2-40B4-BE49-F238E27FC236}">
-                <a16:creationId xmlns:a16="http://schemas.microsoft.com/office/drawing/2014/main" id="{535BB2F0-2029-60B3-1F23-2BF27505BF79}"/>
+                <a16:creationId xmlns:a16="http://schemas.microsoft.com/office/drawing/2014/main" id="{AC378694-C6AA-1DC5-7D4C-AD5EC2765B90}"/>
               </a:ext>
             </a:extLst>
           </p:cNvPr>
@@ -9260,8 +11818,8 @@
         </p:blipFill>
         <p:spPr>
           <a:xfrm>
-            <a:off x="0" y="281814"/>
-            <a:ext cx="9144000" cy="4788877"/>
+            <a:off x="0" y="507551"/>
+            <a:ext cx="9144000" cy="4128398"/>
           </a:xfrm>
           <a:prstGeom prst="rect">
             <a:avLst/>
@@ -9279,14 +11837,6 @@
 <file path=ppt/slides/slide8.xml><?xml version="1.0" encoding="utf-8"?>
 <p:sld xmlns:a="http://schemas.openxmlformats.org/drawingml/2006/main" xmlns:r="http://schemas.openxmlformats.org/officeDocument/2006/relationships" xmlns:p="http://schemas.openxmlformats.org/presentationml/2006/main">
   <p:cSld name="Slide 8">
-    <p:bg>
-      <p:bgPr>
-        <a:solidFill>
-          <a:srgbClr val="0A0A0A"/>
-        </a:solidFill>
-        <a:effectLst/>
-      </p:bgPr>
-    </p:bg>
     <p:spTree>
       <p:nvGrpSpPr>
         <p:cNvPr id="1" name=""/>
@@ -9327,9 +11877,6 @@
             </a:pPr>
             <a:r>
               <a:rPr lang="en-US" sz="2200" b="1" dirty="0">
-                <a:solidFill>
-                  <a:srgbClr val="FFFFFF"/>
-                </a:solidFill>
                 <a:latin typeface="Trebuchet MS" pitchFamily="34" charset="0"/>
                 <a:ea typeface="Trebuchet MS" pitchFamily="34" charset="-122"/>
                 <a:cs typeface="Trebuchet MS" pitchFamily="34" charset="-120"/>
@@ -9381,7 +11928,13 @@
       </p:sp>
       <p:pic>
         <p:nvPicPr>
-          <p:cNvPr id="4" name="Image 0" descr="preencoded.png"/>
+          <p:cNvPr id="10" name="Picture 9" descr="A screen shot of a computer">
+            <a:extLst>
+              <a:ext uri="{FF2B5EF4-FFF2-40B4-BE49-F238E27FC236}">
+                <a16:creationId xmlns:a16="http://schemas.microsoft.com/office/drawing/2014/main" id="{6DB3056E-64D9-CA3A-B6A8-A38E5E295AE3}"/>
+              </a:ext>
+            </a:extLst>
+          </p:cNvPr>
           <p:cNvPicPr>
             <a:picLocks noChangeAspect="1"/>
           </p:cNvPicPr>
@@ -9389,13 +11942,14 @@
         </p:nvPicPr>
         <p:blipFill>
           <a:blip r:embed="rId3"/>
-          <a:srcRect/>
-          <a:stretch/>
+          <a:stretch>
+            <a:fillRect/>
+          </a:stretch>
         </p:blipFill>
         <p:spPr>
           <a:xfrm>
-            <a:off x="2286000" y="868680"/>
-            <a:ext cx="4572000" cy="4206240"/>
+            <a:off x="1641024" y="760424"/>
+            <a:ext cx="5861952" cy="4383076"/>
           </a:xfrm>
           <a:prstGeom prst="rect">
             <a:avLst/>
@@ -9413,14 +11967,6 @@
 <file path=ppt/slides/slide9.xml><?xml version="1.0" encoding="utf-8"?>
 <p:sld xmlns:a="http://schemas.openxmlformats.org/drawingml/2006/main" xmlns:r="http://schemas.openxmlformats.org/officeDocument/2006/relationships" xmlns:p="http://schemas.openxmlformats.org/presentationml/2006/main">
   <p:cSld name="Slide 9">
-    <p:bg>
-      <p:bgPr>
-        <a:solidFill>
-          <a:srgbClr val="0A0A0A"/>
-        </a:solidFill>
-        <a:effectLst/>
-      </p:bgPr>
-    </p:bg>
     <p:spTree>
       <p:nvGrpSpPr>
         <p:cNvPr id="1" name=""/>
@@ -9461,9 +12007,6 @@
             </a:pPr>
             <a:r>
               <a:rPr lang="en-US" sz="2200" b="1" dirty="0">
-                <a:solidFill>
-                  <a:srgbClr val="FFFFFF"/>
-                </a:solidFill>
                 <a:latin typeface="Trebuchet MS" pitchFamily="34" charset="0"/>
                 <a:ea typeface="Trebuchet MS" pitchFamily="34" charset="-122"/>
                 <a:cs typeface="Trebuchet MS" pitchFamily="34" charset="-120"/>
@@ -9515,7 +12058,13 @@
       </p:sp>
       <p:pic>
         <p:nvPicPr>
-          <p:cNvPr id="4" name="Image 0" descr="preencoded.png"/>
+          <p:cNvPr id="8" name="Picture 7" descr="A screenshot of a computer&#10;&#10;AI-generated content may be incorrect.">
+            <a:extLst>
+              <a:ext uri="{FF2B5EF4-FFF2-40B4-BE49-F238E27FC236}">
+                <a16:creationId xmlns:a16="http://schemas.microsoft.com/office/drawing/2014/main" id="{94DF3D8E-E8DA-98F7-B2B5-FEADA8994EE3}"/>
+              </a:ext>
+            </a:extLst>
+          </p:cNvPr>
           <p:cNvPicPr>
             <a:picLocks noChangeAspect="1"/>
           </p:cNvPicPr>
@@ -9523,13 +12072,14 @@
         </p:nvPicPr>
         <p:blipFill>
           <a:blip r:embed="rId3"/>
-          <a:srcRect/>
-          <a:stretch/>
+          <a:stretch>
+            <a:fillRect/>
+          </a:stretch>
         </p:blipFill>
         <p:spPr>
           <a:xfrm>
-            <a:off x="2286000" y="868680"/>
-            <a:ext cx="4572000" cy="4206240"/>
+            <a:off x="1911276" y="798844"/>
+            <a:ext cx="5321448" cy="4207496"/>
           </a:xfrm>
           <a:prstGeom prst="rect">
             <a:avLst/>
@@ -9545,9 +12095,9 @@
 </file>
 
 <file path=ppt/theme/theme1.xml><?xml version="1.0" encoding="utf-8"?>
-<a:theme xmlns:a="http://schemas.openxmlformats.org/drawingml/2006/main" name="Office Theme">
+<a:theme xmlns:a="http://schemas.openxmlformats.org/drawingml/2006/main" name="Office 2013 - 2022 Theme">
   <a:themeElements>
-    <a:clrScheme name="Office">
+    <a:clrScheme name="Office 2013 - 2022 Theme">
       <a:dk1>
         <a:sysClr val="windowText" lastClr="000000"/>
       </a:dk1>
@@ -9585,7 +12135,7 @@
         <a:srgbClr val="954F72"/>
       </a:folHlink>
     </a:clrScheme>
-    <a:fontScheme name="Office">
+    <a:fontScheme name="Office 2013 - 2022 Theme">
       <a:majorFont>
         <a:latin typeface="Calibri Light" panose="020F0302020204030204"/>
         <a:ea typeface=""/>
@@ -9620,23 +12170,6 @@
         <a:font script="Viet" typeface="Times New Roman"/>
         <a:font script="Uigh" typeface="Microsoft Uighur"/>
         <a:font script="Geor" typeface="Sylfaen"/>
-        <a:font script="Armn" typeface="Arial"/>
-        <a:font script="Bugi" typeface="Leelawadee UI"/>
-        <a:font script="Bopo" typeface="Microsoft JhengHei"/>
-        <a:font script="Java" typeface="Javanese Text"/>
-        <a:font script="Lisu" typeface="Segoe UI"/>
-        <a:font script="Mymr" typeface="Myanmar Text"/>
-        <a:font script="Nkoo" typeface="Ebrima"/>
-        <a:font script="Olck" typeface="Nirmala UI"/>
-        <a:font script="Osma" typeface="Ebrima"/>
-        <a:font script="Phag" typeface="Phagspa"/>
-        <a:font script="Syrn" typeface="Estrangelo Edessa"/>
-        <a:font script="Syrj" typeface="Estrangelo Edessa"/>
-        <a:font script="Syre" typeface="Estrangelo Edessa"/>
-        <a:font script="Sora" typeface="Nirmala UI"/>
-        <a:font script="Tale" typeface="Microsoft Tai Le"/>
-        <a:font script="Talu" typeface="Microsoft New Tai Lue"/>
-        <a:font script="Tfng" typeface="Ebrima"/>
       </a:majorFont>
       <a:minorFont>
         <a:latin typeface="Calibri" panose="020F0502020204030204"/>
@@ -9672,26 +12205,9 @@
         <a:font script="Viet" typeface="Arial"/>
         <a:font script="Uigh" typeface="Microsoft Uighur"/>
         <a:font script="Geor" typeface="Sylfaen"/>
-        <a:font script="Armn" typeface="Arial"/>
-        <a:font script="Bugi" typeface="Leelawadee UI"/>
-        <a:font script="Bopo" typeface="Microsoft JhengHei"/>
-        <a:font script="Java" typeface="Javanese Text"/>
-        <a:font script="Lisu" typeface="Segoe UI"/>
-        <a:font script="Mymr" typeface="Myanmar Text"/>
-        <a:font script="Nkoo" typeface="Ebrima"/>
-        <a:font script="Olck" typeface="Nirmala UI"/>
-        <a:font script="Osma" typeface="Ebrima"/>
-        <a:font script="Phag" typeface="Phagspa"/>
-        <a:font script="Syrn" typeface="Estrangelo Edessa"/>
-        <a:font script="Syrj" typeface="Estrangelo Edessa"/>
-        <a:font script="Syre" typeface="Estrangelo Edessa"/>
-        <a:font script="Sora" typeface="Nirmala UI"/>
-        <a:font script="Tale" typeface="Microsoft Tai Le"/>
-        <a:font script="Talu" typeface="Microsoft New Tai Lue"/>
-        <a:font script="Tfng" typeface="Ebrima"/>
       </a:minorFont>
     </a:fontScheme>
-    <a:fmtScheme name="Office">
+    <a:fmtScheme name="Office 2013 - 2022 Theme">
       <a:fillStyleLst>
         <a:solidFill>
           <a:schemeClr val="phClr"/>
@@ -9833,7 +12349,7 @@
   <a:extraClrSchemeLst/>
   <a:extLst>
     <a:ext uri="{05A4C25C-085E-4340-85A3-A5531E510DB2}">
-      <thm15:themeFamily xmlns:thm15="http://schemas.microsoft.com/office/thememl/2012/main" name="Office Theme" id="{62F939B6-93AF-4DB8-9C6B-D6C7DFDC589F}" vid="{4A3C46E8-61CC-4603-A589-7422A47A8E4A}"/>
+      <thm15:themeFamily xmlns:thm15="http://schemas.microsoft.com/office/thememl/2012/main" name="Office 2013 - 2022 Theme" id="{62F939B6-93AF-4DB8-9C6B-D6C7DFDC589F}" vid="{4A3C46E8-61CC-4603-A589-7422A47A8E4A}"/>
     </a:ext>
   </a:extLst>
 </a:theme>

--- a/Звіт/Практика/Презентація_практика_Ніколаєв_1.pptx
+++ b/Звіт/Практика/Презентація_практика_Ніколаєв_1.pptx
@@ -1475,7 +1475,7 @@
           <a:p>
             <a:fld id="{C764DE79-268F-4C1A-8933-263129D2AF90}" type="datetimeFigureOut">
               <a:rPr lang="en-US" smtClean="0"/>
-              <a:t>5/7/2026</a:t>
+              <a:t>5/8/2026</a:t>
             </a:fld>
             <a:endParaRPr lang="en-US" dirty="0"/>
           </a:p>
@@ -1646,7 +1646,7 @@
           <a:p>
             <a:fld id="{C764DE79-268F-4C1A-8933-263129D2AF90}" type="datetimeFigureOut">
               <a:rPr lang="en-US" smtClean="0"/>
-              <a:t>5/7/2026</a:t>
+              <a:t>5/8/2026</a:t>
             </a:fld>
             <a:endParaRPr lang="en-US" dirty="0"/>
           </a:p>
@@ -1827,7 +1827,7 @@
           <a:p>
             <a:fld id="{C764DE79-268F-4C1A-8933-263129D2AF90}" type="datetimeFigureOut">
               <a:rPr lang="en-US" smtClean="0"/>
-              <a:t>5/7/2026</a:t>
+              <a:t>5/8/2026</a:t>
             </a:fld>
             <a:endParaRPr lang="en-US" dirty="0"/>
           </a:p>
@@ -2033,7 +2033,7 @@
           <a:p>
             <a:fld id="{C764DE79-268F-4C1A-8933-263129D2AF90}" type="datetimeFigureOut">
               <a:rPr lang="en-US" smtClean="0"/>
-              <a:t>5/7/2026</a:t>
+              <a:t>5/8/2026</a:t>
             </a:fld>
             <a:endParaRPr lang="en-US" dirty="0"/>
           </a:p>
@@ -2280,7 +2280,7 @@
           <a:p>
             <a:fld id="{C764DE79-268F-4C1A-8933-263129D2AF90}" type="datetimeFigureOut">
               <a:rPr lang="en-US" smtClean="0"/>
-              <a:t>5/7/2026</a:t>
+              <a:t>5/8/2026</a:t>
             </a:fld>
             <a:endParaRPr lang="en-US" dirty="0"/>
           </a:p>
@@ -2513,7 +2513,7 @@
           <a:p>
             <a:fld id="{C764DE79-268F-4C1A-8933-263129D2AF90}" type="datetimeFigureOut">
               <a:rPr lang="en-US" smtClean="0"/>
-              <a:t>5/7/2026</a:t>
+              <a:t>5/8/2026</a:t>
             </a:fld>
             <a:endParaRPr lang="en-US" dirty="0"/>
           </a:p>
@@ -2881,7 +2881,7 @@
           <a:p>
             <a:fld id="{C764DE79-268F-4C1A-8933-263129D2AF90}" type="datetimeFigureOut">
               <a:rPr lang="en-US" smtClean="0"/>
-              <a:t>5/7/2026</a:t>
+              <a:t>5/8/2026</a:t>
             </a:fld>
             <a:endParaRPr lang="en-US" dirty="0"/>
           </a:p>
@@ -3000,7 +3000,7 @@
           <a:p>
             <a:fld id="{C764DE79-268F-4C1A-8933-263129D2AF90}" type="datetimeFigureOut">
               <a:rPr lang="en-US" smtClean="0"/>
-              <a:t>5/7/2026</a:t>
+              <a:t>5/8/2026</a:t>
             </a:fld>
             <a:endParaRPr lang="en-US" dirty="0"/>
           </a:p>
@@ -3096,7 +3096,7 @@
           <a:p>
             <a:fld id="{C764DE79-268F-4C1A-8933-263129D2AF90}" type="datetimeFigureOut">
               <a:rPr lang="en-US" smtClean="0"/>
-              <a:t>5/7/2026</a:t>
+              <a:t>5/8/2026</a:t>
             </a:fld>
             <a:endParaRPr lang="en-US" dirty="0"/>
           </a:p>
@@ -3374,7 +3374,7 @@
           <a:p>
             <a:fld id="{C764DE79-268F-4C1A-8933-263129D2AF90}" type="datetimeFigureOut">
               <a:rPr lang="en-US" smtClean="0"/>
-              <a:t>5/7/2026</a:t>
+              <a:t>5/8/2026</a:t>
             </a:fld>
             <a:endParaRPr lang="en-US" dirty="0"/>
           </a:p>
@@ -3632,7 +3632,7 @@
           <a:p>
             <a:fld id="{C764DE79-268F-4C1A-8933-263129D2AF90}" type="datetimeFigureOut">
               <a:rPr lang="en-US" smtClean="0"/>
-              <a:t>5/7/2026</a:t>
+              <a:t>5/8/2026</a:t>
             </a:fld>
             <a:endParaRPr lang="en-US" dirty="0"/>
           </a:p>
@@ -3846,7 +3846,7 @@
           <a:p>
             <a:fld id="{C764DE79-268F-4C1A-8933-263129D2AF90}" type="datetimeFigureOut">
               <a:rPr lang="en-US" smtClean="0"/>
-              <a:t>5/7/2026</a:t>
+              <a:t>5/8/2026</a:t>
             </a:fld>
             <a:endParaRPr lang="en-US" dirty="0"/>
           </a:p>
@@ -7127,7 +7127,7 @@
               <a:buNone/>
             </a:pPr>
             <a:r>
-              <a:rPr lang="en-US" sz="1300" b="1" dirty="0">
+              <a:rPr lang="en-US" sz="1300" b="1" dirty="0" err="1">
                 <a:solidFill>
                   <a:srgbClr val="0B1D3A"/>
                 </a:solidFill>
@@ -7137,6 +7137,28 @@
               </a:rPr>
               <a:t>Зберігання</a:t>
             </a:r>
+            <a:r>
+              <a:rPr lang="en-US" sz="1300" b="1" dirty="0">
+                <a:solidFill>
+                  <a:srgbClr val="0B1D3A"/>
+                </a:solidFill>
+                <a:latin typeface="Trebuchet MS" pitchFamily="34" charset="0"/>
+                <a:ea typeface="Trebuchet MS" pitchFamily="34" charset="-122"/>
+                <a:cs typeface="Trebuchet MS" pitchFamily="34" charset="-120"/>
+              </a:rPr>
+              <a:t> </a:t>
+            </a:r>
+            <a:r>
+              <a:rPr lang="uk-UA" sz="1300" b="1" dirty="0">
+                <a:solidFill>
+                  <a:srgbClr val="0B1D3A"/>
+                </a:solidFill>
+                <a:latin typeface="Trebuchet MS" pitchFamily="34" charset="0"/>
+                <a:ea typeface="Trebuchet MS" pitchFamily="34" charset="-122"/>
+                <a:cs typeface="Trebuchet MS" pitchFamily="34" charset="-120"/>
+              </a:rPr>
+              <a:t>даних</a:t>
+            </a:r>
             <a:endParaRPr lang="en-US" sz="1300" dirty="0"/>
           </a:p>
         </p:txBody>
@@ -7174,7 +7196,7 @@
                 <a:ea typeface="Calibri" pitchFamily="34" charset="-122"/>
                 <a:cs typeface="Calibri" pitchFamily="34" charset="-120"/>
               </a:rPr>
-              <a:t>JSON / CSV</a:t>
+              <a:t>SQLite, JSON, CSV</a:t>
             </a:r>
             <a:endParaRPr lang="en-US" sz="1150" dirty="0"/>
           </a:p>

--- a/Звіт/Практика/Презентація_практика_Ніколаєв_1.pptx
+++ b/Звіт/Практика/Презентація_практика_Ніколаєв_1.pptx
@@ -4472,7 +4472,18 @@
                 <a:ea typeface="Calibri" pitchFamily="34" charset="-122"/>
                 <a:cs typeface="Calibri" pitchFamily="34" charset="-120"/>
               </a:rPr>
-              <a:t>Ніколаєв Тимур</a:t>
+              <a:t>Ніколаєв </a:t>
+            </a:r>
+            <a:r>
+              <a:rPr lang="uk-UA" sz="1300" b="1" dirty="0">
+                <a:solidFill>
+                  <a:srgbClr val="FFFFFF"/>
+                </a:solidFill>
+                <a:latin typeface="Calibri" pitchFamily="34" charset="0"/>
+                <a:ea typeface="Calibri" pitchFamily="34" charset="-122"/>
+                <a:cs typeface="Calibri" pitchFamily="34" charset="-120"/>
+              </a:rPr>
+              <a:t>Т. О.</a:t>
             </a:r>
             <a:r>
               <a:rPr lang="en-US" sz="1300" dirty="0">
@@ -4483,7 +4494,84 @@
                 <a:ea typeface="Calibri" pitchFamily="34" charset="-122"/>
                 <a:cs typeface="Calibri" pitchFamily="34" charset="-120"/>
               </a:rPr>
-              <a:t>   |   Група: </a:t>
+              <a:t> | </a:t>
+            </a:r>
+            <a:r>
+              <a:rPr lang="ru-UA" sz="1300" dirty="0">
+                <a:solidFill>
+                  <a:srgbClr val="64748B"/>
+                </a:solidFill>
+                <a:latin typeface="Calibri" pitchFamily="34" charset="0"/>
+                <a:ea typeface="Calibri" pitchFamily="34" charset="-122"/>
+                <a:cs typeface="Calibri" pitchFamily="34" charset="-120"/>
+              </a:rPr>
+              <a:t>Кер</a:t>
+            </a:r>
+            <a:r>
+              <a:rPr lang="uk-UA" sz="1300" dirty="0">
+                <a:solidFill>
+                  <a:srgbClr val="64748B"/>
+                </a:solidFill>
+                <a:latin typeface="Calibri" pitchFamily="34" charset="0"/>
+                <a:ea typeface="Calibri" pitchFamily="34" charset="-122"/>
+                <a:cs typeface="Calibri" pitchFamily="34" charset="-120"/>
+              </a:rPr>
+              <a:t>івник: </a:t>
+            </a:r>
+            <a:r>
+              <a:rPr lang="uk-UA" sz="1300" b="1" dirty="0">
+                <a:solidFill>
+                  <a:srgbClr val="FFFFFF"/>
+                </a:solidFill>
+                <a:latin typeface="Calibri" pitchFamily="34" charset="0"/>
+                <a:ea typeface="Calibri" pitchFamily="34" charset="-122"/>
+                <a:cs typeface="Calibri" pitchFamily="34" charset="-120"/>
+              </a:rPr>
+              <a:t>Зе</a:t>
+            </a:r>
+            <a:r>
+              <a:rPr lang="en-US" sz="1300" b="1" dirty="0">
+                <a:solidFill>
+                  <a:srgbClr val="FFFFFF"/>
+                </a:solidFill>
+                <a:latin typeface="Calibri" pitchFamily="34" charset="0"/>
+                <a:ea typeface="Calibri" pitchFamily="34" charset="-122"/>
+                <a:cs typeface="Calibri" pitchFamily="34" charset="-120"/>
+              </a:rPr>
+              <a:t>л</a:t>
+            </a:r>
+            <a:r>
+              <a:rPr lang="uk-UA" sz="1300" b="1" dirty="0">
+                <a:solidFill>
+                  <a:srgbClr val="FFFFFF"/>
+                </a:solidFill>
+                <a:latin typeface="Calibri" pitchFamily="34" charset="0"/>
+                <a:ea typeface="Calibri" pitchFamily="34" charset="-122"/>
+                <a:cs typeface="Calibri" pitchFamily="34" charset="-120"/>
+              </a:rPr>
+              <a:t>енцов Д. Г.</a:t>
+            </a:r>
+            <a:r>
+              <a:rPr lang="uk-UA" sz="1300" dirty="0">
+                <a:solidFill>
+                  <a:srgbClr val="64748B"/>
+                </a:solidFill>
+                <a:latin typeface="Calibri" pitchFamily="34" charset="0"/>
+                <a:ea typeface="Calibri" pitchFamily="34" charset="-122"/>
+                <a:cs typeface="Calibri" pitchFamily="34" charset="-120"/>
+              </a:rPr>
+              <a:t> </a:t>
+            </a:r>
+            <a:r>
+              <a:rPr lang="en-US" sz="1300" dirty="0">
+                <a:solidFill>
+                  <a:srgbClr val="64748B"/>
+                </a:solidFill>
+                <a:latin typeface="Calibri" pitchFamily="34" charset="0"/>
+                <a:ea typeface="Calibri" pitchFamily="34" charset="-122"/>
+                <a:cs typeface="Calibri" pitchFamily="34" charset="-120"/>
+              </a:rPr>
+              <a:t>|   Група: </a:t>
             </a:r>
             <a:r>
               <a:rPr lang="en-US" sz="1300" b="1" dirty="0">
@@ -6909,7 +6997,7 @@
                 <a:ea typeface="Calibri" pitchFamily="34" charset="-122"/>
                 <a:cs typeface="Calibri" pitchFamily="34" charset="-120"/>
               </a:rPr>
-              <a:t>Місткість, швидкість, графік роботи, часові вікна</a:t>
+              <a:t>Місткість, швидкість, графік роботи</a:t>
             </a:r>
             <a:endParaRPr lang="en-US" sz="1150" dirty="0"/>
           </a:p>
@@ -8550,40 +8638,7 @@
                 <a:ea typeface="Calibri" pitchFamily="34" charset="-122"/>
                 <a:cs typeface="Calibri" pitchFamily="34" charset="-120"/>
               </a:rPr>
-              <a:t>Математичні моделі </a:t>
-            </a:r>
-            <a:r>
-              <a:rPr lang="en-US" sz="1250" dirty="0" err="1">
-                <a:solidFill>
-                  <a:srgbClr val="1E293B"/>
-                </a:solidFill>
-                <a:latin typeface="Calibri" pitchFamily="34" charset="0"/>
-                <a:ea typeface="Calibri" pitchFamily="34" charset="-122"/>
-                <a:cs typeface="Calibri" pitchFamily="34" charset="-120"/>
-              </a:rPr>
-              <a:t>та</a:t>
-            </a:r>
-            <a:r>
-              <a:rPr lang="en-US" sz="1250" dirty="0">
-                <a:solidFill>
-                  <a:srgbClr val="1E293B"/>
-                </a:solidFill>
-                <a:latin typeface="Calibri" pitchFamily="34" charset="0"/>
-                <a:ea typeface="Calibri" pitchFamily="34" charset="-122"/>
-                <a:cs typeface="Calibri" pitchFamily="34" charset="-120"/>
-              </a:rPr>
-              <a:t> </a:t>
-            </a:r>
-            <a:r>
-              <a:rPr lang="en-US" sz="1250" dirty="0" err="1">
-                <a:solidFill>
-                  <a:srgbClr val="1E293B"/>
-                </a:solidFill>
-                <a:latin typeface="Calibri" pitchFamily="34" charset="0"/>
-                <a:ea typeface="Calibri" pitchFamily="34" charset="-122"/>
-                <a:cs typeface="Calibri" pitchFamily="34" charset="-120"/>
-              </a:rPr>
-              <a:t>ев</a:t>
+              <a:t>Математичні моделі та ев</a:t>
             </a:r>
             <a:r>
               <a:rPr lang="uk-UA" sz="1250" dirty="0">
@@ -9518,7 +9573,7 @@
               <a:t>більш </a:t>
             </a:r>
             <a:r>
-              <a:rPr lang="en-US" sz="1100" dirty="0" err="1">
+              <a:rPr lang="en-US" sz="1100" dirty="0">
                 <a:solidFill>
                   <a:srgbClr val="1E293B"/>
                 </a:solidFill>
@@ -9526,18 +9581,7 @@
                 <a:ea typeface="Calibri" pitchFamily="34" charset="-122"/>
                 <a:cs typeface="Calibri" pitchFamily="34" charset="-120"/>
               </a:rPr>
-              <a:t>ефективно</a:t>
-            </a:r>
-            <a:r>
-              <a:rPr lang="en-US" sz="1100" dirty="0">
-                <a:solidFill>
-                  <a:srgbClr val="1E293B"/>
-                </a:solidFill>
-                <a:latin typeface="Calibri" pitchFamily="34" charset="0"/>
-                <a:ea typeface="Calibri" pitchFamily="34" charset="-122"/>
-                <a:cs typeface="Calibri" pitchFamily="34" charset="-120"/>
-              </a:rPr>
-              <a:t> досліджують простір NP-складних задач.</a:t>
+              <a:t>ефективно досліджують простір NP-складних задач.</a:t>
             </a:r>
             <a:endParaRPr lang="en-US" sz="1100" dirty="0"/>
           </a:p>
@@ -10175,7 +10219,7 @@
               <a:t>Цільова функція. </a:t>
             </a:r>
             <a:r>
-              <a:rPr lang="en-US" sz="1300" dirty="0" err="1">
+              <a:rPr lang="en-US" sz="1300" dirty="0">
                 <a:solidFill>
                   <a:srgbClr val="1E293B"/>
                 </a:solidFill>
@@ -10183,40 +10227,7 @@
                 <a:ea typeface="Calibri" pitchFamily="34" charset="-122"/>
                 <a:cs typeface="Calibri" pitchFamily="34" charset="-120"/>
               </a:rPr>
-              <a:t>Мінімізація</a:t>
-            </a:r>
-            <a:r>
-              <a:rPr lang="en-US" sz="1300" dirty="0">
-                <a:solidFill>
-                  <a:srgbClr val="1E293B"/>
-                </a:solidFill>
-                <a:latin typeface="Calibri" pitchFamily="34" charset="0"/>
-                <a:ea typeface="Calibri" pitchFamily="34" charset="-122"/>
-                <a:cs typeface="Calibri" pitchFamily="34" charset="-120"/>
-              </a:rPr>
-              <a:t> сумарних витрат: час переїздів + кількість </a:t>
-            </a:r>
-            <a:r>
-              <a:rPr lang="en-US" sz="1300" dirty="0" err="1">
-                <a:solidFill>
-                  <a:srgbClr val="1E293B"/>
-                </a:solidFill>
-                <a:latin typeface="Calibri" pitchFamily="34" charset="0"/>
-                <a:ea typeface="Calibri" pitchFamily="34" charset="-122"/>
-                <a:cs typeface="Calibri" pitchFamily="34" charset="-120"/>
-              </a:rPr>
-              <a:t>задіяних</a:t>
-            </a:r>
-            <a:r>
-              <a:rPr lang="en-US" sz="1300" dirty="0">
-                <a:solidFill>
-                  <a:srgbClr val="1E293B"/>
-                </a:solidFill>
-                <a:latin typeface="Calibri" pitchFamily="34" charset="0"/>
-                <a:ea typeface="Calibri" pitchFamily="34" charset="-122"/>
-                <a:cs typeface="Calibri" pitchFamily="34" charset="-120"/>
-              </a:rPr>
-              <a:t> </a:t>
+              <a:t>Мінімізація сумарних витрат: час переїздів + кількість задіяних </a:t>
             </a:r>
             <a:r>
               <a:rPr lang="uk-UA" sz="1300" dirty="0">
@@ -11950,10 +11961,10 @@
       </p:sp>
       <p:pic>
         <p:nvPicPr>
-          <p:cNvPr id="10" name="Picture 9" descr="A screen shot of a computer">
+          <p:cNvPr id="5" name="Picture 4" descr="A black screen with white lines and text&#10;&#10;AI-generated content may be incorrect.">
             <a:extLst>
               <a:ext uri="{FF2B5EF4-FFF2-40B4-BE49-F238E27FC236}">
-                <a16:creationId xmlns:a16="http://schemas.microsoft.com/office/drawing/2014/main" id="{6DB3056E-64D9-CA3A-B6A8-A38E5E295AE3}"/>
+                <a16:creationId xmlns:a16="http://schemas.microsoft.com/office/drawing/2014/main" id="{2285AB37-1AF3-44A7-D268-8302FF91A532}"/>
               </a:ext>
             </a:extLst>
           </p:cNvPr>
@@ -11970,8 +11981,8 @@
         </p:blipFill>
         <p:spPr>
           <a:xfrm>
-            <a:off x="1641024" y="760424"/>
-            <a:ext cx="5861952" cy="4383076"/>
+            <a:off x="1689578" y="816829"/>
+            <a:ext cx="5764844" cy="4326671"/>
           </a:xfrm>
           <a:prstGeom prst="rect">
             <a:avLst/>
@@ -12080,10 +12091,10 @@
       </p:sp>
       <p:pic>
         <p:nvPicPr>
-          <p:cNvPr id="8" name="Picture 7" descr="A screenshot of a computer&#10;&#10;AI-generated content may be incorrect.">
+          <p:cNvPr id="5" name="Picture 4" descr="A black screen with white lines and blue rectangles&#10;&#10;AI-generated content may be incorrect.">
             <a:extLst>
               <a:ext uri="{FF2B5EF4-FFF2-40B4-BE49-F238E27FC236}">
-                <a16:creationId xmlns:a16="http://schemas.microsoft.com/office/drawing/2014/main" id="{94DF3D8E-E8DA-98F7-B2B5-FEADA8994EE3}"/>
+                <a16:creationId xmlns:a16="http://schemas.microsoft.com/office/drawing/2014/main" id="{9B003E24-A379-6A61-7E30-AD5F94842D3D}"/>
               </a:ext>
             </a:extLst>
           </p:cNvPr>
@@ -12100,8 +12111,8 @@
         </p:blipFill>
         <p:spPr>
           <a:xfrm>
-            <a:off x="1911276" y="798844"/>
-            <a:ext cx="5321448" cy="4207496"/>
+            <a:off x="1788809" y="731520"/>
+            <a:ext cx="5566382" cy="4411980"/>
           </a:xfrm>
           <a:prstGeom prst="rect">
             <a:avLst/>
